--- a/yocto_training_all_session_decks/session_decks/D2S6_Performance.pptx
+++ b/yocto_training_all_session_decks/session_decks/D2S6_Performance.pptx
@@ -5,27 +5,27 @@
     <p:sldMasterId id="2147483648" r:id="rId1"/>
   </p:sldMasterIdLst>
   <p:notesMasterIdLst>
-    <p:notesMasterId r:id="rId8"/>
+    <p:notesMasterId r:id="rId12"/>
   </p:notesMasterIdLst>
   <p:handoutMasterIdLst>
-    <p:handoutMasterId r:id="rId9"/>
+    <p:handoutMasterId r:id="rId13"/>
   </p:handoutMasterIdLst>
   <p:sldIdLst>
-    <p:sldId id="1007" r:id="rId18"/>
-    <p:sldId id="1008" r:id="rId19"/>
-    <p:sldId id="1009" r:id="rId20"/>
-    <p:sldId id="1010" r:id="rId21"/>
-    <p:sldId id="1011" r:id="rId22"/>
-    <p:sldId id="1012" r:id="rId23"/>
-    <p:sldId id="1013" r:id="rId24"/>
-    <p:sldId id="1014" r:id="rId25"/>
-    <p:sldId id="1015" r:id="rId26"/>
-    <p:sldId id="1016" r:id="rId27"/>
+    <p:sldId id="1007" r:id="rId2"/>
+    <p:sldId id="1008" r:id="rId3"/>
+    <p:sldId id="1009" r:id="rId4"/>
+    <p:sldId id="1010" r:id="rId5"/>
+    <p:sldId id="1011" r:id="rId6"/>
+    <p:sldId id="1012" r:id="rId7"/>
+    <p:sldId id="1013" r:id="rId8"/>
+    <p:sldId id="1014" r:id="rId9"/>
+    <p:sldId id="1015" r:id="rId10"/>
+    <p:sldId id="1016" r:id="rId11"/>
   </p:sldIdLst>
   <p:sldSz cx="12192000" cy="6858000"/>
   <p:notesSz cx="6858000" cy="9144000"/>
   <p:custDataLst>
-    <p:tags r:id="rId10"/>
+    <p:tags r:id="rId14"/>
   </p:custDataLst>
   <p:defaultTextStyle>
     <a:defPPr>
@@ -2931,7 +2931,7 @@
           <a:p>
             <a:fld id="{0CEC647C-F50C-4F78-AA33-D7AA6CDA18EE}" type="datetimeFigureOut">
               <a:rPr lang="en-US" smtClean="0"/>
-              <a:t>7/13/2025</a:t>
+              <a:t>6/10/2026</a:t>
             </a:fld>
             <a:endParaRPr lang="en-US"/>
           </a:p>
@@ -3096,7 +3096,7 @@
           <a:p>
             <a:fld id="{3A83341F-E62C-483B-84B4-966F8BE46097}" type="datetimeFigureOut">
               <a:rPr lang="en-US" smtClean="0"/>
-              <a:t>7/13/2025</a:t>
+              <a:t>6/10/2026</a:t>
             </a:fld>
             <a:endParaRPr lang="en-US"/>
           </a:p>
@@ -5180,8 +5180,8 @@
 </p:sldMaster>
 </file>
 
-<file path=ppt/slides/slide10.xml><?xml version="1.0" encoding="utf-8"?>
-<p:sld xmlns:a="http://schemas.openxmlformats.org/drawingml/2006/main" xmlns:p="http://schemas.openxmlformats.org/presentationml/2006/main" xmlns:r="http://schemas.openxmlformats.org/officeDocument/2006/relationships">
+<file path=ppt/slides/slide1.xml><?xml version="1.0" encoding="utf-8"?>
+<p:sld xmlns:a="http://schemas.openxmlformats.org/drawingml/2006/main" xmlns:r="http://schemas.openxmlformats.org/officeDocument/2006/relationships" xmlns:p="http://schemas.openxmlformats.org/presentationml/2006/main">
   <p:cSld>
     <p:spTree>
       <p:nvGrpSpPr>
@@ -5189,7 +5189,102 @@
         <p:cNvGrpSpPr/>
         <p:nvPr/>
       </p:nvGrpSpPr>
-      <p:grpSpPr/>
+      <p:grpSpPr>
+        <a:xfrm>
+          <a:off x="0" y="0"/>
+          <a:ext cx="0" cy="0"/>
+          <a:chOff x="0" y="0"/>
+          <a:chExt cx="0" cy="0"/>
+        </a:xfrm>
+      </p:grpSpPr>
+      <p:sp>
+        <p:nvSpPr>
+          <p:cNvPr id="2" name="Title 1"/>
+          <p:cNvSpPr>
+            <a:spLocks noGrp="1"/>
+          </p:cNvSpPr>
+          <p:nvPr>
+            <p:ph type="ctrTitle"/>
+          </p:nvPr>
+        </p:nvSpPr>
+        <p:spPr/>
+        <p:txBody>
+          <a:bodyPr/>
+          <a:lstStyle/>
+          <a:p>
+            <a:r>
+              <a:rPr sz="4400" b="1">
+                <a:solidFill>
+                  <a:srgbClr val="FFFFFF"/>
+                </a:solidFill>
+                <a:latin typeface="Calibri"/>
+              </a:rPr>
+              <a:t>Performance &amp; Scalability</a:t>
+            </a:r>
+          </a:p>
+        </p:txBody>
+      </p:sp>
+      <p:sp>
+        <p:nvSpPr>
+          <p:cNvPr id="3" name="Subtitle 2"/>
+          <p:cNvSpPr>
+            <a:spLocks noGrp="1"/>
+          </p:cNvSpPr>
+          <p:nvPr>
+            <p:ph type="subTitle" idx="1"/>
+          </p:nvPr>
+        </p:nvSpPr>
+        <p:spPr/>
+        <p:txBody>
+          <a:bodyPr/>
+          <a:lstStyle/>
+          <a:p>
+            <a:r>
+              <a:rPr sz="1800" dirty="0" err="1">
+                <a:solidFill>
+                  <a:srgbClr val="FFFFFF"/>
+                </a:solidFill>
+                <a:latin typeface="Calibri"/>
+              </a:rPr>
+              <a:t>sstate</a:t>
+            </a:r>
+            <a:r>
+              <a:rPr sz="1800" dirty="0">
+                <a:solidFill>
+                  <a:srgbClr val="FFFFFF"/>
+                </a:solidFill>
+                <a:latin typeface="Calibri"/>
+              </a:rPr>
+              <a:t> strategy, parallelism, hash equivalence</a:t>
+            </a:r>
+          </a:p>
+        </p:txBody>
+      </p:sp>
+    </p:spTree>
+  </p:cSld>
+  <p:clrMapOvr>
+    <a:masterClrMapping/>
+  </p:clrMapOvr>
+</p:sld>
+</file>
+
+<file path=ppt/slides/slide10.xml><?xml version="1.0" encoding="utf-8"?>
+<p:sld xmlns:a="http://schemas.openxmlformats.org/drawingml/2006/main" xmlns:r="http://schemas.openxmlformats.org/officeDocument/2006/relationships" xmlns:p="http://schemas.openxmlformats.org/presentationml/2006/main">
+  <p:cSld>
+    <p:spTree>
+      <p:nvGrpSpPr>
+        <p:cNvPr id="1" name=""/>
+        <p:cNvGrpSpPr/>
+        <p:nvPr/>
+      </p:nvGrpSpPr>
+      <p:grpSpPr>
+        <a:xfrm>
+          <a:off x="0" y="0"/>
+          <a:ext cx="0" cy="0"/>
+          <a:chOff x="0" y="0"/>
+          <a:chExt cx="0" cy="0"/>
+        </a:xfrm>
+      </p:grpSpPr>
       <p:sp>
         <p:nvSpPr>
           <p:cNvPr id="2" name="Title 1"/>
@@ -5206,13 +5301,10 @@
           <a:lstStyle/>
           <a:p>
             <a:r>
-              <a:rPr sz="3200" b="1">
-                <a:solidFill>
-                  <a:srgbClr val="CC0066"/>
-                </a:solidFill>
+              <a:rPr sz="3200" b="1" dirty="0">
                 <a:latin typeface="Calibri"/>
               </a:rPr>
-              <a:t>Local Cache vs Shared Mirror</a:t>
+              <a:t>Session Summary</a:t>
             </a:r>
           </a:p>
         </p:txBody>
@@ -5234,7 +5326,1318 @@
           <a:noFill/>
         </p:spPr>
         <p:txBody>
-          <a:bodyPr wrap="square" anchor="t" lIns="45720" rIns="45720">
+          <a:bodyPr wrap="square" lIns="45720" rIns="45720" anchor="t">
+            <a:spAutoFit/>
+          </a:bodyPr>
+          <a:lstStyle/>
+          <a:p>
+            <a:pPr algn="l"/>
+            <a:r>
+              <a:rPr sz="1500" b="0" i="1">
+                <a:solidFill>
+                  <a:srgbClr val="666666"/>
+                </a:solidFill>
+                <a:latin typeface="Calibri"/>
+              </a:rPr>
+              <a:t>5 things to remember from this session.</a:t>
+            </a:r>
+          </a:p>
+        </p:txBody>
+      </p:sp>
+      <p:sp>
+        <p:nvSpPr>
+          <p:cNvPr id="4" name="Rounded Rectangle 3"/>
+          <p:cNvSpPr/>
+          <p:nvPr/>
+        </p:nvSpPr>
+        <p:spPr>
+          <a:xfrm>
+            <a:off x="822960" y="1874519"/>
+            <a:ext cx="457200" cy="548640"/>
+          </a:xfrm>
+          <a:prstGeom prst="roundRect">
+            <a:avLst/>
+          </a:prstGeom>
+          <a:solidFill>
+            <a:srgbClr val="CC0066"/>
+          </a:solidFill>
+          <a:ln>
+            <a:noFill/>
+          </a:ln>
+          <a:effectLst/>
+        </p:spPr>
+        <p:style>
+          <a:lnRef idx="1">
+            <a:schemeClr val="accent1"/>
+          </a:lnRef>
+          <a:fillRef idx="3">
+            <a:schemeClr val="accent1"/>
+          </a:fillRef>
+          <a:effectRef idx="2">
+            <a:schemeClr val="accent1"/>
+          </a:effectRef>
+          <a:fontRef idx="minor">
+            <a:schemeClr val="lt1"/>
+          </a:fontRef>
+        </p:style>
+        <p:txBody>
+          <a:bodyPr lIns="0" rIns="0" rtlCol="0" anchor="ctr"/>
+          <a:lstStyle/>
+          <a:p>
+            <a:pPr algn="ctr"/>
+            <a:r>
+              <a:rPr sz="2200" b="1">
+                <a:solidFill>
+                  <a:srgbClr val="FFFFFF"/>
+                </a:solidFill>
+                <a:latin typeface="Calibri"/>
+              </a:rPr>
+              <a:t>1</a:t>
+            </a:r>
+          </a:p>
+        </p:txBody>
+      </p:sp>
+      <p:sp>
+        <p:nvSpPr>
+          <p:cNvPr id="5" name="TextBox 4"/>
+          <p:cNvSpPr txBox="1"/>
+          <p:nvPr/>
+        </p:nvSpPr>
+        <p:spPr>
+          <a:xfrm>
+            <a:off x="1417320" y="1874519"/>
+            <a:ext cx="10058400" cy="320040"/>
+          </a:xfrm>
+          <a:prstGeom prst="rect">
+            <a:avLst/>
+          </a:prstGeom>
+          <a:noFill/>
+        </p:spPr>
+        <p:txBody>
+          <a:bodyPr wrap="square" lIns="45720" rIns="45720" anchor="t">
+            <a:spAutoFit/>
+          </a:bodyPr>
+          <a:lstStyle/>
+          <a:p>
+            <a:pPr algn="l"/>
+            <a:r>
+              <a:rPr sz="1600" b="1" i="0">
+                <a:solidFill>
+                  <a:srgbClr val="663399"/>
+                </a:solidFill>
+                <a:latin typeface="Calibri"/>
+              </a:rPr>
+              <a:t>sstate cache turns slow builds into fast ones</a:t>
+            </a:r>
+          </a:p>
+        </p:txBody>
+      </p:sp>
+      <p:sp>
+        <p:nvSpPr>
+          <p:cNvPr id="6" name="TextBox 5"/>
+          <p:cNvSpPr txBox="1"/>
+          <p:nvPr/>
+        </p:nvSpPr>
+        <p:spPr>
+          <a:xfrm>
+            <a:off x="1417320" y="2185415"/>
+            <a:ext cx="10058400" cy="320040"/>
+          </a:xfrm>
+          <a:prstGeom prst="rect">
+            <a:avLst/>
+          </a:prstGeom>
+          <a:noFill/>
+        </p:spPr>
+        <p:txBody>
+          <a:bodyPr wrap="square" lIns="45720" rIns="45720" anchor="t">
+            <a:spAutoFit/>
+          </a:bodyPr>
+          <a:lstStyle/>
+          <a:p>
+            <a:pPr algn="l"/>
+            <a:r>
+              <a:rPr sz="1300" b="0" i="0">
+                <a:solidFill>
+                  <a:srgbClr val="333333"/>
+                </a:solidFill>
+                <a:latin typeface="Calibri"/>
+              </a:rPr>
+              <a:t>Every task hashed; matching hash = skip the task</a:t>
+            </a:r>
+          </a:p>
+        </p:txBody>
+      </p:sp>
+      <p:sp>
+        <p:nvSpPr>
+          <p:cNvPr id="7" name="Rounded Rectangle 6"/>
+          <p:cNvSpPr/>
+          <p:nvPr/>
+        </p:nvSpPr>
+        <p:spPr>
+          <a:xfrm>
+            <a:off x="822960" y="2587752"/>
+            <a:ext cx="457200" cy="548640"/>
+          </a:xfrm>
+          <a:prstGeom prst="roundRect">
+            <a:avLst/>
+          </a:prstGeom>
+          <a:solidFill>
+            <a:srgbClr val="CC0066"/>
+          </a:solidFill>
+          <a:ln>
+            <a:noFill/>
+          </a:ln>
+          <a:effectLst/>
+        </p:spPr>
+        <p:style>
+          <a:lnRef idx="1">
+            <a:schemeClr val="accent1"/>
+          </a:lnRef>
+          <a:fillRef idx="3">
+            <a:schemeClr val="accent1"/>
+          </a:fillRef>
+          <a:effectRef idx="2">
+            <a:schemeClr val="accent1"/>
+          </a:effectRef>
+          <a:fontRef idx="minor">
+            <a:schemeClr val="lt1"/>
+          </a:fontRef>
+        </p:style>
+        <p:txBody>
+          <a:bodyPr lIns="0" rIns="0" rtlCol="0" anchor="ctr"/>
+          <a:lstStyle/>
+          <a:p>
+            <a:pPr algn="ctr"/>
+            <a:r>
+              <a:rPr sz="2200" b="1">
+                <a:solidFill>
+                  <a:srgbClr val="FFFFFF"/>
+                </a:solidFill>
+                <a:latin typeface="Calibri"/>
+              </a:rPr>
+              <a:t>2</a:t>
+            </a:r>
+          </a:p>
+        </p:txBody>
+      </p:sp>
+      <p:sp>
+        <p:nvSpPr>
+          <p:cNvPr id="8" name="TextBox 7"/>
+          <p:cNvSpPr txBox="1"/>
+          <p:nvPr/>
+        </p:nvSpPr>
+        <p:spPr>
+          <a:xfrm>
+            <a:off x="1417320" y="2587752"/>
+            <a:ext cx="10058400" cy="320040"/>
+          </a:xfrm>
+          <a:prstGeom prst="rect">
+            <a:avLst/>
+          </a:prstGeom>
+          <a:noFill/>
+        </p:spPr>
+        <p:txBody>
+          <a:bodyPr wrap="square" lIns="45720" rIns="45720" anchor="t">
+            <a:spAutoFit/>
+          </a:bodyPr>
+          <a:lstStyle/>
+          <a:p>
+            <a:pPr algn="l"/>
+            <a:r>
+              <a:rPr sz="1600" b="1" i="0">
+                <a:solidFill>
+                  <a:srgbClr val="663399"/>
+                </a:solidFill>
+                <a:latin typeface="Calibri"/>
+              </a:rPr>
+              <a:t>Shared mirrors make sstate a team asset</a:t>
+            </a:r>
+          </a:p>
+        </p:txBody>
+      </p:sp>
+      <p:sp>
+        <p:nvSpPr>
+          <p:cNvPr id="9" name="TextBox 8"/>
+          <p:cNvSpPr txBox="1"/>
+          <p:nvPr/>
+        </p:nvSpPr>
+        <p:spPr>
+          <a:xfrm>
+            <a:off x="1417320" y="2898648"/>
+            <a:ext cx="10058400" cy="320040"/>
+          </a:xfrm>
+          <a:prstGeom prst="rect">
+            <a:avLst/>
+          </a:prstGeom>
+          <a:noFill/>
+        </p:spPr>
+        <p:txBody>
+          <a:bodyPr wrap="square" lIns="45720" rIns="45720" anchor="t">
+            <a:spAutoFit/>
+          </a:bodyPr>
+          <a:lstStyle/>
+          <a:p>
+            <a:pPr algn="l"/>
+            <a:r>
+              <a:rPr sz="1300" b="0" i="0">
+                <a:solidFill>
+                  <a:srgbClr val="333333"/>
+                </a:solidFill>
+                <a:latin typeface="Calibri"/>
+              </a:rPr>
+              <a:t>One CI build benefits everyone; setup is just an HTTP server</a:t>
+            </a:r>
+          </a:p>
+        </p:txBody>
+      </p:sp>
+      <p:sp>
+        <p:nvSpPr>
+          <p:cNvPr id="10" name="Rounded Rectangle 9"/>
+          <p:cNvSpPr/>
+          <p:nvPr/>
+        </p:nvSpPr>
+        <p:spPr>
+          <a:xfrm>
+            <a:off x="822960" y="3300984"/>
+            <a:ext cx="457200" cy="548640"/>
+          </a:xfrm>
+          <a:prstGeom prst="roundRect">
+            <a:avLst/>
+          </a:prstGeom>
+          <a:solidFill>
+            <a:srgbClr val="CC0066"/>
+          </a:solidFill>
+          <a:ln>
+            <a:noFill/>
+          </a:ln>
+          <a:effectLst/>
+        </p:spPr>
+        <p:style>
+          <a:lnRef idx="1">
+            <a:schemeClr val="accent1"/>
+          </a:lnRef>
+          <a:fillRef idx="3">
+            <a:schemeClr val="accent1"/>
+          </a:fillRef>
+          <a:effectRef idx="2">
+            <a:schemeClr val="accent1"/>
+          </a:effectRef>
+          <a:fontRef idx="minor">
+            <a:schemeClr val="lt1"/>
+          </a:fontRef>
+        </p:style>
+        <p:txBody>
+          <a:bodyPr lIns="0" rIns="0" rtlCol="0" anchor="ctr"/>
+          <a:lstStyle/>
+          <a:p>
+            <a:pPr algn="ctr"/>
+            <a:r>
+              <a:rPr sz="2200" b="1">
+                <a:solidFill>
+                  <a:srgbClr val="FFFFFF"/>
+                </a:solidFill>
+                <a:latin typeface="Calibri"/>
+              </a:rPr>
+              <a:t>3</a:t>
+            </a:r>
+          </a:p>
+        </p:txBody>
+      </p:sp>
+      <p:sp>
+        <p:nvSpPr>
+          <p:cNvPr id="11" name="TextBox 10"/>
+          <p:cNvSpPr txBox="1"/>
+          <p:nvPr/>
+        </p:nvSpPr>
+        <p:spPr>
+          <a:xfrm>
+            <a:off x="1417320" y="3300984"/>
+            <a:ext cx="10058400" cy="320040"/>
+          </a:xfrm>
+          <a:prstGeom prst="rect">
+            <a:avLst/>
+          </a:prstGeom>
+          <a:noFill/>
+        </p:spPr>
+        <p:txBody>
+          <a:bodyPr wrap="square" lIns="45720" rIns="45720" anchor="t">
+            <a:spAutoFit/>
+          </a:bodyPr>
+          <a:lstStyle/>
+          <a:p>
+            <a:pPr algn="l"/>
+            <a:r>
+              <a:rPr sz="1600" b="1" i="0">
+                <a:solidFill>
+                  <a:srgbClr val="663399"/>
+                </a:solidFill>
+                <a:latin typeface="Calibri"/>
+              </a:rPr>
+              <a:t>Parallelism × Make threads can OOM you</a:t>
+            </a:r>
+          </a:p>
+        </p:txBody>
+      </p:sp>
+      <p:sp>
+        <p:nvSpPr>
+          <p:cNvPr id="12" name="TextBox 11"/>
+          <p:cNvSpPr txBox="1"/>
+          <p:nvPr/>
+        </p:nvSpPr>
+        <p:spPr>
+          <a:xfrm>
+            <a:off x="1417320" y="3611879"/>
+            <a:ext cx="10058400" cy="320040"/>
+          </a:xfrm>
+          <a:prstGeom prst="rect">
+            <a:avLst/>
+          </a:prstGeom>
+          <a:noFill/>
+        </p:spPr>
+        <p:txBody>
+          <a:bodyPr wrap="square" lIns="45720" rIns="45720" anchor="t">
+            <a:spAutoFit/>
+          </a:bodyPr>
+          <a:lstStyle/>
+          <a:p>
+            <a:pPr algn="l"/>
+            <a:r>
+              <a:rPr sz="1300" b="0" i="0">
+                <a:solidFill>
+                  <a:srgbClr val="333333"/>
+                </a:solidFill>
+                <a:latin typeface="Calibri"/>
+              </a:rPr>
+              <a:t>BB_NUMBER_THREADS × PARALLEL_MAKE ≈ cores × 2 ceiling</a:t>
+            </a:r>
+          </a:p>
+        </p:txBody>
+      </p:sp>
+      <p:sp>
+        <p:nvSpPr>
+          <p:cNvPr id="13" name="Rounded Rectangle 12"/>
+          <p:cNvSpPr/>
+          <p:nvPr/>
+        </p:nvSpPr>
+        <p:spPr>
+          <a:xfrm>
+            <a:off x="822960" y="4014215"/>
+            <a:ext cx="457200" cy="548640"/>
+          </a:xfrm>
+          <a:prstGeom prst="roundRect">
+            <a:avLst/>
+          </a:prstGeom>
+          <a:solidFill>
+            <a:srgbClr val="CC0066"/>
+          </a:solidFill>
+          <a:ln>
+            <a:noFill/>
+          </a:ln>
+          <a:effectLst/>
+        </p:spPr>
+        <p:style>
+          <a:lnRef idx="1">
+            <a:schemeClr val="accent1"/>
+          </a:lnRef>
+          <a:fillRef idx="3">
+            <a:schemeClr val="accent1"/>
+          </a:fillRef>
+          <a:effectRef idx="2">
+            <a:schemeClr val="accent1"/>
+          </a:effectRef>
+          <a:fontRef idx="minor">
+            <a:schemeClr val="lt1"/>
+          </a:fontRef>
+        </p:style>
+        <p:txBody>
+          <a:bodyPr lIns="0" rIns="0" rtlCol="0" anchor="ctr"/>
+          <a:lstStyle/>
+          <a:p>
+            <a:pPr algn="ctr"/>
+            <a:r>
+              <a:rPr sz="2200" b="1">
+                <a:solidFill>
+                  <a:srgbClr val="FFFFFF"/>
+                </a:solidFill>
+                <a:latin typeface="Calibri"/>
+              </a:rPr>
+              <a:t>4</a:t>
+            </a:r>
+          </a:p>
+        </p:txBody>
+      </p:sp>
+      <p:sp>
+        <p:nvSpPr>
+          <p:cNvPr id="14" name="TextBox 13"/>
+          <p:cNvSpPr txBox="1"/>
+          <p:nvPr/>
+        </p:nvSpPr>
+        <p:spPr>
+          <a:xfrm>
+            <a:off x="1417320" y="4014215"/>
+            <a:ext cx="10058400" cy="320040"/>
+          </a:xfrm>
+          <a:prstGeom prst="rect">
+            <a:avLst/>
+          </a:prstGeom>
+          <a:noFill/>
+        </p:spPr>
+        <p:txBody>
+          <a:bodyPr wrap="square" lIns="45720" rIns="45720" anchor="t">
+            <a:spAutoFit/>
+          </a:bodyPr>
+          <a:lstStyle/>
+          <a:p>
+            <a:pPr algn="l"/>
+            <a:r>
+              <a:rPr sz="1600" b="1" i="0">
+                <a:solidFill>
+                  <a:srgbClr val="663399"/>
+                </a:solidFill>
+                <a:latin typeface="Calibri"/>
+              </a:rPr>
+              <a:t>Hash equivalence rescues cache from cosmetic changes</a:t>
+            </a:r>
+          </a:p>
+        </p:txBody>
+      </p:sp>
+      <p:sp>
+        <p:nvSpPr>
+          <p:cNvPr id="15" name="TextBox 14"/>
+          <p:cNvSpPr txBox="1"/>
+          <p:nvPr/>
+        </p:nvSpPr>
+        <p:spPr>
+          <a:xfrm>
+            <a:off x="1417320" y="4325112"/>
+            <a:ext cx="10058400" cy="320040"/>
+          </a:xfrm>
+          <a:prstGeom prst="rect">
+            <a:avLst/>
+          </a:prstGeom>
+          <a:noFill/>
+        </p:spPr>
+        <p:txBody>
+          <a:bodyPr wrap="square" lIns="45720" rIns="45720" anchor="t">
+            <a:spAutoFit/>
+          </a:bodyPr>
+          <a:lstStyle/>
+          <a:p>
+            <a:pPr algn="l"/>
+            <a:r>
+              <a:rPr sz="1300" b="0" i="0">
+                <a:solidFill>
+                  <a:srgbClr val="333333"/>
+                </a:solidFill>
+                <a:latin typeface="Calibri"/>
+              </a:rPr>
+              <a:t>Worth it at any team scale; essential beyond 10 devs</a:t>
+            </a:r>
+          </a:p>
+        </p:txBody>
+      </p:sp>
+      <p:sp>
+        <p:nvSpPr>
+          <p:cNvPr id="16" name="Rounded Rectangle 15"/>
+          <p:cNvSpPr/>
+          <p:nvPr/>
+        </p:nvSpPr>
+        <p:spPr>
+          <a:xfrm>
+            <a:off x="822960" y="4727448"/>
+            <a:ext cx="457200" cy="548640"/>
+          </a:xfrm>
+          <a:prstGeom prst="roundRect">
+            <a:avLst/>
+          </a:prstGeom>
+          <a:solidFill>
+            <a:srgbClr val="CC0066"/>
+          </a:solidFill>
+          <a:ln>
+            <a:noFill/>
+          </a:ln>
+          <a:effectLst/>
+        </p:spPr>
+        <p:style>
+          <a:lnRef idx="1">
+            <a:schemeClr val="accent1"/>
+          </a:lnRef>
+          <a:fillRef idx="3">
+            <a:schemeClr val="accent1"/>
+          </a:fillRef>
+          <a:effectRef idx="2">
+            <a:schemeClr val="accent1"/>
+          </a:effectRef>
+          <a:fontRef idx="minor">
+            <a:schemeClr val="lt1"/>
+          </a:fontRef>
+        </p:style>
+        <p:txBody>
+          <a:bodyPr lIns="0" rIns="0" rtlCol="0" anchor="ctr"/>
+          <a:lstStyle/>
+          <a:p>
+            <a:pPr algn="ctr"/>
+            <a:r>
+              <a:rPr sz="2200" b="1">
+                <a:solidFill>
+                  <a:srgbClr val="FFFFFF"/>
+                </a:solidFill>
+                <a:latin typeface="Calibri"/>
+              </a:rPr>
+              <a:t>5</a:t>
+            </a:r>
+          </a:p>
+        </p:txBody>
+      </p:sp>
+      <p:sp>
+        <p:nvSpPr>
+          <p:cNvPr id="17" name="TextBox 16"/>
+          <p:cNvSpPr txBox="1"/>
+          <p:nvPr/>
+        </p:nvSpPr>
+        <p:spPr>
+          <a:xfrm>
+            <a:off x="1417320" y="4727448"/>
+            <a:ext cx="10058400" cy="320040"/>
+          </a:xfrm>
+          <a:prstGeom prst="rect">
+            <a:avLst/>
+          </a:prstGeom>
+          <a:noFill/>
+        </p:spPr>
+        <p:txBody>
+          <a:bodyPr wrap="square" lIns="45720" rIns="45720" anchor="t">
+            <a:spAutoFit/>
+          </a:bodyPr>
+          <a:lstStyle/>
+          <a:p>
+            <a:pPr algn="l"/>
+            <a:r>
+              <a:rPr sz="1600" b="1" i="0">
+                <a:solidFill>
+                  <a:srgbClr val="663399"/>
+                </a:solidFill>
+                <a:latin typeface="Calibri"/>
+              </a:rPr>
+              <a:t>Measure before you tune</a:t>
+            </a:r>
+          </a:p>
+        </p:txBody>
+      </p:sp>
+      <p:sp>
+        <p:nvSpPr>
+          <p:cNvPr id="18" name="TextBox 17"/>
+          <p:cNvSpPr txBox="1"/>
+          <p:nvPr/>
+        </p:nvSpPr>
+        <p:spPr>
+          <a:xfrm>
+            <a:off x="1417320" y="5038344"/>
+            <a:ext cx="10058400" cy="320040"/>
+          </a:xfrm>
+          <a:prstGeom prst="rect">
+            <a:avLst/>
+          </a:prstGeom>
+          <a:noFill/>
+        </p:spPr>
+        <p:txBody>
+          <a:bodyPr wrap="square" lIns="45720" rIns="45720" anchor="t">
+            <a:spAutoFit/>
+          </a:bodyPr>
+          <a:lstStyle/>
+          <a:p>
+            <a:pPr algn="l"/>
+            <a:r>
+              <a:rPr sz="1300" b="0" i="0">
+                <a:solidFill>
+                  <a:srgbClr val="333333"/>
+                </a:solidFill>
+                <a:latin typeface="Calibri"/>
+              </a:rPr>
+              <a:t>buildstats-summary shows the actual slow tasks; don't optimize blind</a:t>
+            </a:r>
+          </a:p>
+        </p:txBody>
+      </p:sp>
+      <p:sp>
+        <p:nvSpPr>
+          <p:cNvPr id="19" name="Rounded Rectangle 18"/>
+          <p:cNvSpPr/>
+          <p:nvPr/>
+        </p:nvSpPr>
+        <p:spPr>
+          <a:xfrm>
+            <a:off x="822960" y="5669280"/>
+            <a:ext cx="10561320" cy="640080"/>
+          </a:xfrm>
+          <a:prstGeom prst="roundRect">
+            <a:avLst/>
+          </a:prstGeom>
+          <a:solidFill>
+            <a:srgbClr val="FBE6F0"/>
+          </a:solidFill>
+          <a:ln>
+            <a:noFill/>
+          </a:ln>
+          <a:effectLst/>
+        </p:spPr>
+        <p:style>
+          <a:lnRef idx="1">
+            <a:schemeClr val="accent1"/>
+          </a:lnRef>
+          <a:fillRef idx="3">
+            <a:schemeClr val="accent1"/>
+          </a:fillRef>
+          <a:effectRef idx="2">
+            <a:schemeClr val="accent1"/>
+          </a:effectRef>
+          <a:fontRef idx="minor">
+            <a:schemeClr val="lt1"/>
+          </a:fontRef>
+        </p:style>
+        <p:txBody>
+          <a:bodyPr lIns="228600" rtlCol="0" anchor="ctr"/>
+          <a:lstStyle/>
+          <a:p>
+            <a:pPr algn="ctr"/>
+            <a:r>
+              <a:rPr sz="1400" b="1" dirty="0">
+                <a:solidFill>
+                  <a:srgbClr val="663399"/>
+                </a:solidFill>
+                <a:latin typeface="Calibri"/>
+              </a:rPr>
+              <a:t>Next session  →  </a:t>
+            </a:r>
+            <a:r>
+              <a:rPr sz="1400" dirty="0">
+                <a:solidFill>
+                  <a:srgbClr val="333333"/>
+                </a:solidFill>
+                <a:latin typeface="Calibri"/>
+              </a:rPr>
+              <a:t>Hands-on lab </a:t>
+            </a:r>
+            <a:r>
+              <a:rPr lang="en-IN" sz="1400" dirty="0">
+                <a:solidFill>
+                  <a:srgbClr val="333333"/>
+                </a:solidFill>
+                <a:latin typeface="Calibri"/>
+              </a:rPr>
+              <a:t>: </a:t>
+            </a:r>
+            <a:r>
+              <a:rPr sz="1400" dirty="0">
+                <a:solidFill>
+                  <a:srgbClr val="333333"/>
+                </a:solidFill>
+                <a:latin typeface="Calibri"/>
+              </a:rPr>
+              <a:t>apply Day 2 to </a:t>
+            </a:r>
+            <a:r>
+              <a:rPr sz="1400" dirty="0" err="1">
+                <a:solidFill>
+                  <a:srgbClr val="333333"/>
+                </a:solidFill>
+                <a:latin typeface="Calibri"/>
+              </a:rPr>
+              <a:t>TrainerGW</a:t>
+            </a:r>
+            <a:endParaRPr sz="1400" dirty="0">
+              <a:solidFill>
+                <a:srgbClr val="333333"/>
+              </a:solidFill>
+              <a:latin typeface="Calibri"/>
+            </a:endParaRPr>
+          </a:p>
+        </p:txBody>
+      </p:sp>
+    </p:spTree>
+  </p:cSld>
+  <p:clrMapOvr>
+    <a:masterClrMapping/>
+  </p:clrMapOvr>
+</p:sld>
+</file>
+
+<file path=ppt/slides/slide2.xml><?xml version="1.0" encoding="utf-8"?>
+<p:sld xmlns:a="http://schemas.openxmlformats.org/drawingml/2006/main" xmlns:r="http://schemas.openxmlformats.org/officeDocument/2006/relationships" xmlns:p="http://schemas.openxmlformats.org/presentationml/2006/main">
+  <p:cSld>
+    <p:spTree>
+      <p:nvGrpSpPr>
+        <p:cNvPr id="1" name=""/>
+        <p:cNvGrpSpPr/>
+        <p:nvPr/>
+      </p:nvGrpSpPr>
+      <p:grpSpPr>
+        <a:xfrm>
+          <a:off x="0" y="0"/>
+          <a:ext cx="0" cy="0"/>
+          <a:chOff x="0" y="0"/>
+          <a:chExt cx="0" cy="0"/>
+        </a:xfrm>
+      </p:grpSpPr>
+      <p:sp>
+        <p:nvSpPr>
+          <p:cNvPr id="2" name="Title 1"/>
+          <p:cNvSpPr>
+            <a:spLocks noGrp="1"/>
+          </p:cNvSpPr>
+          <p:nvPr>
+            <p:ph type="title"/>
+          </p:nvPr>
+        </p:nvSpPr>
+        <p:spPr/>
+        <p:txBody>
+          <a:bodyPr/>
+          <a:lstStyle/>
+          <a:p>
+            <a:r>
+              <a:rPr sz="3200" b="1" dirty="0">
+                <a:latin typeface="Calibri"/>
+              </a:rPr>
+              <a:t>Session Agenda</a:t>
+            </a:r>
+          </a:p>
+        </p:txBody>
+      </p:sp>
+      <p:sp>
+        <p:nvSpPr>
+          <p:cNvPr id="3" name="TextBox 2"/>
+          <p:cNvSpPr txBox="1"/>
+          <p:nvPr/>
+        </p:nvSpPr>
+        <p:spPr>
+          <a:xfrm>
+            <a:off x="822960" y="1463040"/>
+            <a:ext cx="10515600" cy="5029200"/>
+          </a:xfrm>
+          <a:prstGeom prst="rect">
+            <a:avLst/>
+          </a:prstGeom>
+          <a:noFill/>
+        </p:spPr>
+        <p:txBody>
+          <a:bodyPr wrap="square" lIns="45720" rIns="45720">
+            <a:spAutoFit/>
+          </a:bodyPr>
+          <a:lstStyle/>
+          <a:p>
+            <a:pPr>
+              <a:spcAft>
+                <a:spcPts val="600"/>
+              </a:spcAft>
+            </a:pPr>
+            <a:r>
+              <a:rPr sz="2000" b="0" i="0">
+                <a:solidFill>
+                  <a:srgbClr val="333333"/>
+                </a:solidFill>
+                <a:latin typeface="Calibri"/>
+              </a:rPr>
+              <a:t>1.  How sstate cache really works</a:t>
+            </a:r>
+          </a:p>
+          <a:p>
+            <a:pPr>
+              <a:spcAft>
+                <a:spcPts val="600"/>
+              </a:spcAft>
+            </a:pPr>
+            <a:r>
+              <a:rPr sz="2000" b="0" i="0">
+                <a:solidFill>
+                  <a:srgbClr val="333333"/>
+                </a:solidFill>
+                <a:latin typeface="Calibri"/>
+              </a:rPr>
+              <a:t>2.  Local cache vs shared mirror</a:t>
+            </a:r>
+          </a:p>
+          <a:p>
+            <a:pPr>
+              <a:spcAft>
+                <a:spcPts val="600"/>
+              </a:spcAft>
+            </a:pPr>
+            <a:r>
+              <a:rPr sz="2000" b="0" i="0">
+                <a:solidFill>
+                  <a:srgbClr val="333333"/>
+                </a:solidFill>
+                <a:latin typeface="Calibri"/>
+              </a:rPr>
+              <a:t>3.  Setting up a team sstate mirror</a:t>
+            </a:r>
+          </a:p>
+          <a:p>
+            <a:pPr>
+              <a:spcAft>
+                <a:spcPts val="600"/>
+              </a:spcAft>
+            </a:pPr>
+            <a:r>
+              <a:rPr sz="2000" b="0" i="0">
+                <a:solidFill>
+                  <a:srgbClr val="333333"/>
+                </a:solidFill>
+                <a:latin typeface="Calibri"/>
+              </a:rPr>
+              <a:t>4.  Parallelism — BB_NUMBER_THREADS, PARALLEL_MAKE</a:t>
+            </a:r>
+          </a:p>
+          <a:p>
+            <a:pPr>
+              <a:spcAft>
+                <a:spcPts val="600"/>
+              </a:spcAft>
+            </a:pPr>
+            <a:r>
+              <a:rPr sz="2000" b="0" i="0">
+                <a:solidFill>
+                  <a:srgbClr val="333333"/>
+                </a:solidFill>
+                <a:latin typeface="Calibri"/>
+              </a:rPr>
+              <a:t>5.  Avoiding OOM and thrashing</a:t>
+            </a:r>
+          </a:p>
+          <a:p>
+            <a:pPr>
+              <a:spcAft>
+                <a:spcPts val="600"/>
+              </a:spcAft>
+            </a:pPr>
+            <a:r>
+              <a:rPr sz="2000" b="0" i="0">
+                <a:solidFill>
+                  <a:srgbClr val="333333"/>
+                </a:solidFill>
+                <a:latin typeface="Calibri"/>
+              </a:rPr>
+              <a:t>6.  Hash equivalence — reusing more cache hits</a:t>
+            </a:r>
+          </a:p>
+          <a:p>
+            <a:pPr>
+              <a:spcAft>
+                <a:spcPts val="600"/>
+              </a:spcAft>
+            </a:pPr>
+            <a:r>
+              <a:rPr sz="2000" b="0" i="0">
+                <a:solidFill>
+                  <a:srgbClr val="333333"/>
+                </a:solidFill>
+                <a:latin typeface="Calibri"/>
+              </a:rPr>
+              <a:t>7.  Measuring what's slow</a:t>
+            </a:r>
+          </a:p>
+        </p:txBody>
+      </p:sp>
+    </p:spTree>
+  </p:cSld>
+  <p:clrMapOvr>
+    <a:masterClrMapping/>
+  </p:clrMapOvr>
+</p:sld>
+</file>
+
+<file path=ppt/slides/slide3.xml><?xml version="1.0" encoding="utf-8"?>
+<p:sld xmlns:a="http://schemas.openxmlformats.org/drawingml/2006/main" xmlns:r="http://schemas.openxmlformats.org/officeDocument/2006/relationships" xmlns:p="http://schemas.openxmlformats.org/presentationml/2006/main">
+  <p:cSld>
+    <p:spTree>
+      <p:nvGrpSpPr>
+        <p:cNvPr id="1" name=""/>
+        <p:cNvGrpSpPr/>
+        <p:nvPr/>
+      </p:nvGrpSpPr>
+      <p:grpSpPr>
+        <a:xfrm>
+          <a:off x="0" y="0"/>
+          <a:ext cx="0" cy="0"/>
+          <a:chOff x="0" y="0"/>
+          <a:chExt cx="0" cy="0"/>
+        </a:xfrm>
+      </p:grpSpPr>
+      <p:sp>
+        <p:nvSpPr>
+          <p:cNvPr id="2" name="Title 1"/>
+          <p:cNvSpPr>
+            <a:spLocks noGrp="1"/>
+          </p:cNvSpPr>
+          <p:nvPr>
+            <p:ph type="title"/>
+          </p:nvPr>
+        </p:nvSpPr>
+        <p:spPr/>
+        <p:txBody>
+          <a:bodyPr/>
+          <a:lstStyle/>
+          <a:p>
+            <a:r>
+              <a:rPr sz="3200" b="1" dirty="0">
+                <a:latin typeface="Calibri"/>
+              </a:rPr>
+              <a:t>How </a:t>
+            </a:r>
+            <a:r>
+              <a:rPr sz="3200" b="1" dirty="0" err="1">
+                <a:latin typeface="Calibri"/>
+              </a:rPr>
+              <a:t>sstate</a:t>
+            </a:r>
+            <a:r>
+              <a:rPr sz="3200" b="1" dirty="0">
+                <a:latin typeface="Calibri"/>
+              </a:rPr>
+              <a:t> Cache Works</a:t>
+            </a:r>
+          </a:p>
+        </p:txBody>
+      </p:sp>
+      <p:sp>
+        <p:nvSpPr>
+          <p:cNvPr id="3" name="TextBox 2"/>
+          <p:cNvSpPr txBox="1"/>
+          <p:nvPr/>
+        </p:nvSpPr>
+        <p:spPr>
+          <a:xfrm>
+            <a:off x="822960" y="1417320"/>
+            <a:ext cx="10515600" cy="365760"/>
+          </a:xfrm>
+          <a:prstGeom prst="rect">
+            <a:avLst/>
+          </a:prstGeom>
+          <a:noFill/>
+        </p:spPr>
+        <p:txBody>
+          <a:bodyPr wrap="square" lIns="45720" rIns="45720" anchor="t">
+            <a:spAutoFit/>
+          </a:bodyPr>
+          <a:lstStyle/>
+          <a:p>
+            <a:pPr algn="l"/>
+            <a:r>
+              <a:rPr sz="1500" b="0" i="1">
+                <a:solidFill>
+                  <a:srgbClr val="666666"/>
+                </a:solidFill>
+                <a:latin typeface="Calibri"/>
+              </a:rPr>
+              <a:t>Yocto's superpower — and why builds get fast.</a:t>
+            </a:r>
+          </a:p>
+        </p:txBody>
+      </p:sp>
+      <p:sp>
+        <p:nvSpPr>
+          <p:cNvPr id="4" name="TextBox 3"/>
+          <p:cNvSpPr txBox="1"/>
+          <p:nvPr/>
+        </p:nvSpPr>
+        <p:spPr>
+          <a:xfrm>
+            <a:off x="822960" y="1783080"/>
+            <a:ext cx="10515600" cy="3354765"/>
+          </a:xfrm>
+          <a:prstGeom prst="rect">
+            <a:avLst/>
+          </a:prstGeom>
+          <a:noFill/>
+        </p:spPr>
+        <p:txBody>
+          <a:bodyPr wrap="square" lIns="45720" rIns="45720">
+            <a:spAutoFit/>
+          </a:bodyPr>
+          <a:lstStyle/>
+          <a:p>
+            <a:pPr>
+              <a:spcAft>
+                <a:spcPts val="400"/>
+              </a:spcAft>
+            </a:pPr>
+            <a:r>
+              <a:rPr sz="2000" b="1" i="0" dirty="0">
+                <a:solidFill>
+                  <a:srgbClr val="CC0066"/>
+                </a:solidFill>
+                <a:latin typeface="Calibri"/>
+              </a:rPr>
+              <a:t>Every task has a signature</a:t>
+            </a:r>
+          </a:p>
+          <a:p>
+            <a:pPr>
+              <a:spcAft>
+                <a:spcPts val="1000"/>
+              </a:spcAft>
+            </a:pPr>
+            <a:r>
+              <a:rPr sz="1600" b="0" i="0" dirty="0">
+                <a:solidFill>
+                  <a:srgbClr val="333333"/>
+                </a:solidFill>
+                <a:latin typeface="Calibri"/>
+              </a:rPr>
+              <a:t>A hash computed from all the inputs: source content, recipe content, config variables, dependencies' signatures.</a:t>
+            </a:r>
+          </a:p>
+          <a:p>
+            <a:pPr>
+              <a:spcAft>
+                <a:spcPts val="400"/>
+              </a:spcAft>
+            </a:pPr>
+            <a:r>
+              <a:rPr sz="2000" b="1" i="0" dirty="0">
+                <a:solidFill>
+                  <a:srgbClr val="CC0066"/>
+                </a:solidFill>
+                <a:latin typeface="Calibri"/>
+              </a:rPr>
+              <a:t>Signature → cache lookup</a:t>
+            </a:r>
+          </a:p>
+          <a:p>
+            <a:pPr>
+              <a:spcAft>
+                <a:spcPts val="1000"/>
+              </a:spcAft>
+            </a:pPr>
+            <a:r>
+              <a:rPr sz="1600" b="0" i="0" dirty="0">
+                <a:solidFill>
+                  <a:srgbClr val="333333"/>
+                </a:solidFill>
+                <a:latin typeface="Calibri"/>
+              </a:rPr>
+              <a:t>Before running a task, </a:t>
+            </a:r>
+            <a:r>
+              <a:rPr sz="1600" b="0" i="0" dirty="0" err="1">
+                <a:solidFill>
+                  <a:srgbClr val="333333"/>
+                </a:solidFill>
+                <a:latin typeface="Calibri"/>
+              </a:rPr>
+              <a:t>BitBake</a:t>
+            </a:r>
+            <a:r>
+              <a:rPr sz="1600" b="0" i="0" dirty="0">
+                <a:solidFill>
+                  <a:srgbClr val="333333"/>
+                </a:solidFill>
+                <a:latin typeface="Calibri"/>
+              </a:rPr>
+              <a:t> checks SSTATE_DIR for a </a:t>
+            </a:r>
+            <a:r>
+              <a:rPr sz="1600" b="0" i="0" dirty="0" err="1">
+                <a:solidFill>
+                  <a:srgbClr val="333333"/>
+                </a:solidFill>
+                <a:latin typeface="Calibri"/>
+              </a:rPr>
+              <a:t>tarball</a:t>
+            </a:r>
+            <a:r>
+              <a:rPr sz="1600" b="0" i="0" dirty="0">
+                <a:solidFill>
+                  <a:srgbClr val="333333"/>
+                </a:solidFill>
+                <a:latin typeface="Calibri"/>
+              </a:rPr>
+              <a:t> with that signature. If found: extract, skip the task.</a:t>
+            </a:r>
+          </a:p>
+          <a:p>
+            <a:pPr>
+              <a:spcAft>
+                <a:spcPts val="400"/>
+              </a:spcAft>
+            </a:pPr>
+            <a:r>
+              <a:rPr sz="2000" b="1" i="0" dirty="0">
+                <a:solidFill>
+                  <a:srgbClr val="CC0066"/>
+                </a:solidFill>
+                <a:latin typeface="Calibri"/>
+              </a:rPr>
+              <a:t>What changes invalidate the cache?</a:t>
+            </a:r>
+          </a:p>
+          <a:p>
+            <a:pPr>
+              <a:spcAft>
+                <a:spcPts val="400"/>
+              </a:spcAft>
+            </a:pPr>
+            <a:r>
+              <a:rPr sz="1600" b="0" i="0" dirty="0">
+                <a:solidFill>
+                  <a:srgbClr val="333333"/>
+                </a:solidFill>
+                <a:latin typeface="Calibri"/>
+              </a:rPr>
+              <a:t>• Source code change (different sha256)</a:t>
+            </a:r>
+          </a:p>
+          <a:p>
+            <a:pPr>
+              <a:spcAft>
+                <a:spcPts val="400"/>
+              </a:spcAft>
+            </a:pPr>
+            <a:r>
+              <a:rPr sz="1600" b="0" i="0" dirty="0">
+                <a:solidFill>
+                  <a:srgbClr val="333333"/>
+                </a:solidFill>
+                <a:latin typeface="Calibri"/>
+              </a:rPr>
+              <a:t>• Recipe change (any line, including comments)</a:t>
+            </a:r>
+          </a:p>
+          <a:p>
+            <a:pPr>
+              <a:spcAft>
+                <a:spcPts val="400"/>
+              </a:spcAft>
+            </a:pPr>
+            <a:r>
+              <a:rPr sz="1600" b="0" i="0" dirty="0">
+                <a:solidFill>
+                  <a:srgbClr val="333333"/>
+                </a:solidFill>
+                <a:latin typeface="Calibri"/>
+              </a:rPr>
+              <a:t>• Config variables the task depends on</a:t>
+            </a:r>
+          </a:p>
+          <a:p>
+            <a:pPr>
+              <a:spcAft>
+                <a:spcPts val="400"/>
+              </a:spcAft>
+            </a:pPr>
+            <a:r>
+              <a:rPr sz="1600" b="0" i="0" dirty="0">
+                <a:solidFill>
+                  <a:srgbClr val="333333"/>
+                </a:solidFill>
+                <a:latin typeface="Calibri"/>
+              </a:rPr>
+              <a:t>• Toolchain change (different </a:t>
+            </a:r>
+            <a:r>
+              <a:rPr sz="1600" b="0" i="0" dirty="0" err="1">
+                <a:solidFill>
+                  <a:srgbClr val="333333"/>
+                </a:solidFill>
+                <a:latin typeface="Calibri"/>
+              </a:rPr>
+              <a:t>gcc</a:t>
+            </a:r>
+            <a:r>
+              <a:rPr sz="1600" b="0" i="0" dirty="0">
+                <a:solidFill>
+                  <a:srgbClr val="333333"/>
+                </a:solidFill>
+                <a:latin typeface="Calibri"/>
+              </a:rPr>
+              <a:t> version)</a:t>
+            </a:r>
+          </a:p>
+          <a:p>
+            <a:pPr>
+              <a:spcAft>
+                <a:spcPts val="400"/>
+              </a:spcAft>
+            </a:pPr>
+            <a:r>
+              <a:rPr sz="1600" b="0" i="0" dirty="0">
+                <a:solidFill>
+                  <a:srgbClr val="333333"/>
+                </a:solidFill>
+                <a:latin typeface="Calibri"/>
+              </a:rPr>
+              <a:t>• Dependency's signature change (cascades)</a:t>
+            </a:r>
+          </a:p>
+        </p:txBody>
+      </p:sp>
+    </p:spTree>
+  </p:cSld>
+  <p:clrMapOvr>
+    <a:masterClrMapping/>
+  </p:clrMapOvr>
+</p:sld>
+</file>
+
+<file path=ppt/slides/slide4.xml><?xml version="1.0" encoding="utf-8"?>
+<p:sld xmlns:a="http://schemas.openxmlformats.org/drawingml/2006/main" xmlns:r="http://schemas.openxmlformats.org/officeDocument/2006/relationships" xmlns:p="http://schemas.openxmlformats.org/presentationml/2006/main">
+  <p:cSld>
+    <p:spTree>
+      <p:nvGrpSpPr>
+        <p:cNvPr id="1" name=""/>
+        <p:cNvGrpSpPr/>
+        <p:nvPr/>
+      </p:nvGrpSpPr>
+      <p:grpSpPr>
+        <a:xfrm>
+          <a:off x="0" y="0"/>
+          <a:ext cx="0" cy="0"/>
+          <a:chOff x="0" y="0"/>
+          <a:chExt cx="0" cy="0"/>
+        </a:xfrm>
+      </p:grpSpPr>
+      <p:sp>
+        <p:nvSpPr>
+          <p:cNvPr id="2" name="Title 1"/>
+          <p:cNvSpPr>
+            <a:spLocks noGrp="1"/>
+          </p:cNvSpPr>
+          <p:nvPr>
+            <p:ph type="title"/>
+          </p:nvPr>
+        </p:nvSpPr>
+        <p:spPr/>
+        <p:txBody>
+          <a:bodyPr/>
+          <a:lstStyle/>
+          <a:p>
+            <a:r>
+              <a:rPr sz="3200" b="1" dirty="0">
+                <a:latin typeface="Calibri"/>
+              </a:rPr>
+              <a:t>Local Cache vs Shared Mirror</a:t>
+            </a:r>
+          </a:p>
+        </p:txBody>
+      </p:sp>
+      <p:sp>
+        <p:nvSpPr>
+          <p:cNvPr id="3" name="TextBox 2"/>
+          <p:cNvSpPr txBox="1"/>
+          <p:nvPr/>
+        </p:nvSpPr>
+        <p:spPr>
+          <a:xfrm>
+            <a:off x="822960" y="1417320"/>
+            <a:ext cx="10515600" cy="365760"/>
+          </a:xfrm>
+          <a:prstGeom prst="rect">
+            <a:avLst/>
+          </a:prstGeom>
+          <a:noFill/>
+        </p:spPr>
+        <p:txBody>
+          <a:bodyPr wrap="square" lIns="45720" rIns="45720" anchor="t">
             <a:spAutoFit/>
           </a:bodyPr>
           <a:lstStyle/>
@@ -5295,6 +6698,7 @@
           <a:lstStyle/>
           <a:p>
             <a:pPr algn="ctr"/>
+            <a:endParaRPr/>
           </a:p>
         </p:txBody>
       </p:sp>
@@ -5315,7 +6719,7 @@
           <a:noFill/>
         </p:spPr>
         <p:txBody>
-          <a:bodyPr wrap="square" anchor="t" lIns="45720" rIns="45720">
+          <a:bodyPr wrap="square" lIns="45720" rIns="45720" anchor="t">
             <a:spAutoFit/>
           </a:bodyPr>
           <a:lstStyle/>
@@ -5342,7 +6746,7 @@
         <p:spPr>
           <a:xfrm>
             <a:off x="960120" y="2468880"/>
-            <a:ext cx="4937760" cy="3794760"/>
+            <a:ext cx="4937760" cy="2246769"/>
           </a:xfrm>
           <a:prstGeom prst="rect">
             <a:avLst/>
@@ -5361,7 +6765,7 @@
               </a:spcAft>
             </a:pPr>
             <a:r>
-              <a:rPr sz="1300" b="1" i="0">
+              <a:rPr sz="1600" b="1" i="0">
                 <a:solidFill>
                   <a:srgbClr val="CC0066"/>
                 </a:solidFill>
@@ -5377,7 +6781,7 @@
               </a:spcAft>
             </a:pPr>
             <a:r>
-              <a:rPr sz="1100" b="0" i="0">
+              <a:rPr sz="1400" b="0" i="0">
                 <a:solidFill>
                   <a:srgbClr val="333333"/>
                 </a:solidFill>
@@ -5393,7 +6797,7 @@
               </a:spcAft>
             </a:pPr>
             <a:r>
-              <a:rPr sz="1300" b="1" i="0">
+              <a:rPr sz="1600" b="1" i="0">
                 <a:solidFill>
                   <a:srgbClr val="CC0066"/>
                 </a:solidFill>
@@ -5409,7 +6813,7 @@
               </a:spcAft>
             </a:pPr>
             <a:r>
-              <a:rPr sz="1200" b="0" i="0">
+              <a:rPr sz="1600" b="0" i="0">
                 <a:solidFill>
                   <a:srgbClr val="333333"/>
                 </a:solidFill>
@@ -5425,7 +6829,7 @@
               </a:spcAft>
             </a:pPr>
             <a:r>
-              <a:rPr sz="1300" b="1" i="0">
+              <a:rPr sz="1600" b="1" i="0">
                 <a:solidFill>
                   <a:srgbClr val="CC0066"/>
                 </a:solidFill>
@@ -5441,7 +6845,7 @@
               </a:spcAft>
             </a:pPr>
             <a:r>
-              <a:rPr sz="1200" b="0" i="0">
+              <a:rPr sz="1600" b="0" i="0">
                 <a:solidFill>
                   <a:srgbClr val="333333"/>
                 </a:solidFill>
@@ -5457,7 +6861,7 @@
               </a:spcAft>
             </a:pPr>
             <a:r>
-              <a:rPr sz="1200" b="0" i="1">
+              <a:rPr sz="1600" b="0" i="1">
                 <a:solidFill>
                   <a:srgbClr val="333333"/>
                 </a:solidFill>
@@ -5511,6 +6915,7 @@
           <a:lstStyle/>
           <a:p>
             <a:pPr algn="ctr"/>
+            <a:endParaRPr/>
           </a:p>
         </p:txBody>
       </p:sp>
@@ -5531,7 +6936,7 @@
           <a:noFill/>
         </p:spPr>
         <p:txBody>
-          <a:bodyPr wrap="square" anchor="t" lIns="45720" rIns="45720">
+          <a:bodyPr wrap="square" lIns="45720" rIns="45720" anchor="t">
             <a:spAutoFit/>
           </a:bodyPr>
           <a:lstStyle/>
@@ -5558,7 +6963,7 @@
         <p:spPr>
           <a:xfrm>
             <a:off x="6400800" y="2468880"/>
-            <a:ext cx="4937760" cy="3794760"/>
+            <a:ext cx="4937760" cy="2446824"/>
           </a:xfrm>
           <a:prstGeom prst="rect">
             <a:avLst/>
@@ -5577,7 +6982,7 @@
               </a:spcAft>
             </a:pPr>
             <a:r>
-              <a:rPr sz="1300" b="1" i="0">
+              <a:rPr sz="1600" b="1" i="0" dirty="0">
                 <a:solidFill>
                   <a:srgbClr val="663399"/>
                 </a:solidFill>
@@ -5593,7 +6998,7 @@
               </a:spcAft>
             </a:pPr>
             <a:r>
-              <a:rPr sz="1000" b="0" i="0">
+              <a:rPr sz="1100" b="0" i="0" dirty="0">
                 <a:solidFill>
                   <a:srgbClr val="333333"/>
                 </a:solidFill>
@@ -5609,7 +7014,7 @@
               </a:spcAft>
             </a:pPr>
             <a:r>
-              <a:rPr sz="1300" b="1" i="0">
+              <a:rPr sz="1600" b="1" i="0" dirty="0">
                 <a:solidFill>
                   <a:srgbClr val="663399"/>
                 </a:solidFill>
@@ -5625,7 +7030,7 @@
               </a:spcAft>
             </a:pPr>
             <a:r>
-              <a:rPr sz="1200" b="0" i="0">
+              <a:rPr sz="1600" b="0" i="0" dirty="0">
                 <a:solidFill>
                   <a:srgbClr val="333333"/>
                 </a:solidFill>
@@ -5641,7 +7046,7 @@
               </a:spcAft>
             </a:pPr>
             <a:r>
-              <a:rPr sz="1300" b="1" i="0">
+              <a:rPr sz="1600" b="1" i="0" dirty="0">
                 <a:solidFill>
                   <a:srgbClr val="663399"/>
                 </a:solidFill>
@@ -5657,7 +7062,7 @@
               </a:spcAft>
             </a:pPr>
             <a:r>
-              <a:rPr sz="1200" b="0" i="0">
+              <a:rPr sz="1600" b="0" i="0" dirty="0">
                 <a:solidFill>
                   <a:srgbClr val="333333"/>
                 </a:solidFill>
@@ -5673,13 +7078,31 @@
               </a:spcAft>
             </a:pPr>
             <a:r>
-              <a:rPr sz="1200" b="0" i="1">
+              <a:rPr sz="1600" b="0" i="1" dirty="0">
                 <a:solidFill>
                   <a:srgbClr val="333333"/>
                 </a:solidFill>
                 <a:latin typeface="Calibri"/>
               </a:rPr>
-              <a:t>CI typically builds into this; devs read from it</a:t>
+              <a:t>CI typically builds into this; </a:t>
+            </a:r>
+            <a:r>
+              <a:rPr sz="1600" b="0" i="1" dirty="0" err="1">
+                <a:solidFill>
+                  <a:srgbClr val="333333"/>
+                </a:solidFill>
+                <a:latin typeface="Calibri"/>
+              </a:rPr>
+              <a:t>devs</a:t>
+            </a:r>
+            <a:r>
+              <a:rPr sz="1600" b="0" i="1" dirty="0">
+                <a:solidFill>
+                  <a:srgbClr val="333333"/>
+                </a:solidFill>
+                <a:latin typeface="Calibri"/>
+              </a:rPr>
+              <a:t> read from it</a:t>
             </a:r>
           </a:p>
         </p:txBody>
@@ -5692,8 +7115,8 @@
 </p:sld>
 </file>
 
-<file path=ppt/slides/slide11.xml><?xml version="1.0" encoding="utf-8"?>
-<p:sld xmlns:a="http://schemas.openxmlformats.org/drawingml/2006/main" xmlns:p="http://schemas.openxmlformats.org/presentationml/2006/main" xmlns:r="http://schemas.openxmlformats.org/officeDocument/2006/relationships">
+<file path=ppt/slides/slide5.xml><?xml version="1.0" encoding="utf-8"?>
+<p:sld xmlns:a="http://schemas.openxmlformats.org/drawingml/2006/main" xmlns:r="http://schemas.openxmlformats.org/officeDocument/2006/relationships" xmlns:p="http://schemas.openxmlformats.org/presentationml/2006/main">
   <p:cSld>
     <p:spTree>
       <p:nvGrpSpPr>
@@ -5701,7 +7124,14 @@
         <p:cNvGrpSpPr/>
         <p:nvPr/>
       </p:nvGrpSpPr>
-      <p:grpSpPr/>
+      <p:grpSpPr>
+        <a:xfrm>
+          <a:off x="0" y="0"/>
+          <a:ext cx="0" cy="0"/>
+          <a:chOff x="0" y="0"/>
+          <a:chExt cx="0" cy="0"/>
+        </a:xfrm>
+      </p:grpSpPr>
       <p:sp>
         <p:nvSpPr>
           <p:cNvPr id="2" name="Title 1"/>
@@ -5718,10 +7148,7 @@
           <a:lstStyle/>
           <a:p>
             <a:r>
-              <a:rPr sz="3200" b="1">
-                <a:solidFill>
-                  <a:srgbClr val="CC0066"/>
-                </a:solidFill>
+              <a:rPr sz="3200" b="1" dirty="0">
                 <a:latin typeface="Calibri"/>
               </a:rPr>
               <a:t>Setting Up a Shared Mirror</a:t>
@@ -5746,7 +7173,7 @@
           <a:noFill/>
         </p:spPr>
         <p:txBody>
-          <a:bodyPr wrap="square" anchor="t" lIns="45720" rIns="45720">
+          <a:bodyPr wrap="square" lIns="45720" rIns="45720" anchor="t">
             <a:spAutoFit/>
           </a:bodyPr>
           <a:lstStyle/>
@@ -5807,6 +7234,7 @@
           <a:lstStyle/>
           <a:p>
             <a:pPr algn="ctr"/>
+            <a:endParaRPr/>
           </a:p>
         </p:txBody>
       </p:sp>
@@ -5851,6 +7279,7 @@
           <a:lstStyle/>
           <a:p>
             <a:pPr algn="ctr"/>
+            <a:endParaRPr/>
           </a:p>
         </p:txBody>
       </p:sp>
@@ -5862,8 +7291,8 @@
         </p:nvSpPr>
         <p:spPr>
           <a:xfrm>
-            <a:off x="1005840" y="1874519"/>
-            <a:ext cx="10241280" cy="4389120"/>
+            <a:off x="1197864" y="1731461"/>
+            <a:ext cx="10241280" cy="4616648"/>
           </a:xfrm>
           <a:prstGeom prst="rect">
             <a:avLst/>
@@ -5882,7 +7311,7 @@
               </a:spcAft>
             </a:pPr>
             <a:r>
-              <a:rPr sz="1100" i="1">
+              <a:rPr sz="1400" i="1" dirty="0">
                 <a:solidFill>
                   <a:srgbClr val="808080"/>
                 </a:solidFill>
@@ -5898,7 +7327,7 @@
               </a:spcAft>
             </a:pPr>
             <a:r>
-              <a:rPr sz="1100" i="1">
+              <a:rPr sz="1400" i="1" dirty="0">
                 <a:solidFill>
                   <a:srgbClr val="808080"/>
                 </a:solidFill>
@@ -5914,7 +7343,7 @@
               </a:spcAft>
             </a:pPr>
             <a:r>
-              <a:rPr sz="1100">
+              <a:rPr sz="1400" dirty="0">
                 <a:solidFill>
                   <a:srgbClr val="2D2D2D"/>
                 </a:solidFill>
@@ -5930,13 +7359,49 @@
               </a:spcAft>
             </a:pPr>
             <a:r>
-              <a:rPr sz="1100">
+              <a:rPr sz="1400" dirty="0">
                 <a:solidFill>
                   <a:srgbClr val="2D2D2D"/>
                 </a:solidFill>
                 <a:latin typeface="Consolas"/>
               </a:rPr>
-              <a:t>SSTATE_DIR = "/srv/yocto-sstate"</a:t>
+              <a:t>SSTATE_DIR = "/</a:t>
+            </a:r>
+            <a:r>
+              <a:rPr sz="1400" dirty="0" err="1">
+                <a:solidFill>
+                  <a:srgbClr val="2D2D2D"/>
+                </a:solidFill>
+                <a:latin typeface="Consolas"/>
+              </a:rPr>
+              <a:t>srv</a:t>
+            </a:r>
+            <a:r>
+              <a:rPr sz="1400" dirty="0">
+                <a:solidFill>
+                  <a:srgbClr val="2D2D2D"/>
+                </a:solidFill>
+                <a:latin typeface="Consolas"/>
+              </a:rPr>
+              <a:t>/yocto-</a:t>
+            </a:r>
+            <a:r>
+              <a:rPr sz="1400" dirty="0" err="1">
+                <a:solidFill>
+                  <a:srgbClr val="2D2D2D"/>
+                </a:solidFill>
+                <a:latin typeface="Consolas"/>
+              </a:rPr>
+              <a:t>sstate</a:t>
+            </a:r>
+            <a:r>
+              <a:rPr sz="1400" dirty="0">
+                <a:solidFill>
+                  <a:srgbClr val="2D2D2D"/>
+                </a:solidFill>
+                <a:latin typeface="Consolas"/>
+              </a:rPr>
+              <a:t>"</a:t>
             </a:r>
           </a:p>
           <a:p>
@@ -5946,7 +7411,7 @@
               </a:spcAft>
             </a:pPr>
             <a:r>
-              <a:rPr sz="1100">
+              <a:rPr sz="1400" dirty="0">
                 <a:solidFill>
                   <a:srgbClr val="2D2D2D"/>
                 </a:solidFill>
@@ -5962,7 +7427,7 @@
               </a:spcAft>
             </a:pPr>
             <a:r>
-              <a:rPr sz="1100" i="1">
+              <a:rPr sz="1400" i="1" dirty="0">
                 <a:solidFill>
                   <a:srgbClr val="808080"/>
                 </a:solidFill>
@@ -5978,13 +7443,67 @@
               </a:spcAft>
             </a:pPr>
             <a:r>
-              <a:rPr sz="1100" i="1">
+              <a:rPr sz="1400" i="1" dirty="0">
                 <a:solidFill>
                   <a:srgbClr val="808080"/>
                 </a:solidFill>
                 <a:latin typeface="Consolas"/>
               </a:rPr>
-              <a:t>#    /etc/nginx/conf.d/sstate.conf:</a:t>
+              <a:t>#    /</a:t>
+            </a:r>
+            <a:r>
+              <a:rPr sz="1400" i="1" dirty="0" err="1">
+                <a:solidFill>
+                  <a:srgbClr val="808080"/>
+                </a:solidFill>
+                <a:latin typeface="Consolas"/>
+              </a:rPr>
+              <a:t>etc</a:t>
+            </a:r>
+            <a:r>
+              <a:rPr sz="1400" i="1" dirty="0">
+                <a:solidFill>
+                  <a:srgbClr val="808080"/>
+                </a:solidFill>
+                <a:latin typeface="Consolas"/>
+              </a:rPr>
+              <a:t>/nginx/</a:t>
+            </a:r>
+            <a:r>
+              <a:rPr sz="1400" i="1" dirty="0" err="1">
+                <a:solidFill>
+                  <a:srgbClr val="808080"/>
+                </a:solidFill>
+                <a:latin typeface="Consolas"/>
+              </a:rPr>
+              <a:t>conf.d</a:t>
+            </a:r>
+            <a:r>
+              <a:rPr sz="1400" i="1" dirty="0">
+                <a:solidFill>
+                  <a:srgbClr val="808080"/>
+                </a:solidFill>
+                <a:latin typeface="Consolas"/>
+              </a:rPr>
+              <a:t>/</a:t>
+            </a:r>
+            <a:r>
+              <a:rPr sz="1400" i="1" dirty="0" err="1">
+                <a:solidFill>
+                  <a:srgbClr val="808080"/>
+                </a:solidFill>
+                <a:latin typeface="Consolas"/>
+              </a:rPr>
+              <a:t>sstate.conf</a:t>
+            </a:r>
+            <a:r>
+              <a:rPr sz="1400" i="1" dirty="0">
+                <a:solidFill>
+                  <a:srgbClr val="808080"/>
+                </a:solidFill>
+                <a:latin typeface="Consolas"/>
+              </a:rPr>
+              <a:t>:</a:t>
             </a:r>
           </a:p>
           <a:p>
@@ -5994,7 +7513,7 @@
               </a:spcAft>
             </a:pPr>
             <a:r>
-              <a:rPr sz="1100">
+              <a:rPr sz="1400" dirty="0">
                 <a:solidFill>
                   <a:srgbClr val="2D2D2D"/>
                 </a:solidFill>
@@ -6010,7 +7529,7 @@
               </a:spcAft>
             </a:pPr>
             <a:r>
-              <a:rPr sz="1100">
+              <a:rPr sz="1400" dirty="0">
                 <a:solidFill>
                   <a:srgbClr val="2D2D2D"/>
                 </a:solidFill>
@@ -6026,7 +7545,7 @@
               </a:spcAft>
             </a:pPr>
             <a:r>
-              <a:rPr sz="1100">
+              <a:rPr sz="1400" dirty="0">
                 <a:solidFill>
                   <a:srgbClr val="2D2D2D"/>
                 </a:solidFill>
@@ -6042,13 +7561,49 @@
               </a:spcAft>
             </a:pPr>
             <a:r>
-              <a:rPr sz="1100">
+              <a:rPr sz="1400" dirty="0">
                 <a:solidFill>
                   <a:srgbClr val="2D2D2D"/>
                 </a:solidFill>
                 <a:latin typeface="Consolas"/>
               </a:rPr>
-              <a:t>    server_name build.company.local;</a:t>
+              <a:t>    </a:t>
+            </a:r>
+            <a:r>
+              <a:rPr sz="1400" dirty="0" err="1">
+                <a:solidFill>
+                  <a:srgbClr val="2D2D2D"/>
+                </a:solidFill>
+                <a:latin typeface="Consolas"/>
+              </a:rPr>
+              <a:t>server_name</a:t>
+            </a:r>
+            <a:r>
+              <a:rPr sz="1400" dirty="0">
+                <a:solidFill>
+                  <a:srgbClr val="2D2D2D"/>
+                </a:solidFill>
+                <a:latin typeface="Consolas"/>
+              </a:rPr>
+              <a:t> </a:t>
+            </a:r>
+            <a:r>
+              <a:rPr sz="1400" dirty="0" err="1">
+                <a:solidFill>
+                  <a:srgbClr val="2D2D2D"/>
+                </a:solidFill>
+                <a:latin typeface="Consolas"/>
+              </a:rPr>
+              <a:t>build.company.local</a:t>
+            </a:r>
+            <a:r>
+              <a:rPr sz="1400" dirty="0">
+                <a:solidFill>
+                  <a:srgbClr val="2D2D2D"/>
+                </a:solidFill>
+                <a:latin typeface="Consolas"/>
+              </a:rPr>
+              <a:t>;</a:t>
             </a:r>
           </a:p>
           <a:p>
@@ -6058,7 +7613,7 @@
               </a:spcAft>
             </a:pPr>
             <a:r>
-              <a:rPr sz="1100">
+              <a:rPr sz="1400" dirty="0">
                 <a:solidFill>
                   <a:srgbClr val="2D2D2D"/>
                 </a:solidFill>
@@ -6074,13 +7629,49 @@
               </a:spcAft>
             </a:pPr>
             <a:r>
-              <a:rPr sz="1100">
+              <a:rPr sz="1400" dirty="0">
                 <a:solidFill>
                   <a:srgbClr val="2D2D2D"/>
                 </a:solidFill>
                 <a:latin typeface="Consolas"/>
               </a:rPr>
-              <a:t>        root /srv/yocto-sstate;</a:t>
+              <a:t>        root /</a:t>
+            </a:r>
+            <a:r>
+              <a:rPr sz="1400" dirty="0" err="1">
+                <a:solidFill>
+                  <a:srgbClr val="2D2D2D"/>
+                </a:solidFill>
+                <a:latin typeface="Consolas"/>
+              </a:rPr>
+              <a:t>srv</a:t>
+            </a:r>
+            <a:r>
+              <a:rPr sz="1400" dirty="0">
+                <a:solidFill>
+                  <a:srgbClr val="2D2D2D"/>
+                </a:solidFill>
+                <a:latin typeface="Consolas"/>
+              </a:rPr>
+              <a:t>/yocto-</a:t>
+            </a:r>
+            <a:r>
+              <a:rPr sz="1400" dirty="0" err="1">
+                <a:solidFill>
+                  <a:srgbClr val="2D2D2D"/>
+                </a:solidFill>
+                <a:latin typeface="Consolas"/>
+              </a:rPr>
+              <a:t>sstate</a:t>
+            </a:r>
+            <a:r>
+              <a:rPr sz="1400" dirty="0">
+                <a:solidFill>
+                  <a:srgbClr val="2D2D2D"/>
+                </a:solidFill>
+                <a:latin typeface="Consolas"/>
+              </a:rPr>
+              <a:t>;</a:t>
             </a:r>
           </a:p>
           <a:p>
@@ -6090,13 +7681,31 @@
               </a:spcAft>
             </a:pPr>
             <a:r>
-              <a:rPr sz="1100">
+              <a:rPr sz="1400" dirty="0">
                 <a:solidFill>
                   <a:srgbClr val="2D2D2D"/>
                 </a:solidFill>
                 <a:latin typeface="Consolas"/>
               </a:rPr>
-              <a:t>        autoindex on;</a:t>
+              <a:t>        </a:t>
+            </a:r>
+            <a:r>
+              <a:rPr sz="1400" dirty="0" err="1">
+                <a:solidFill>
+                  <a:srgbClr val="2D2D2D"/>
+                </a:solidFill>
+                <a:latin typeface="Consolas"/>
+              </a:rPr>
+              <a:t>autoindex</a:t>
+            </a:r>
+            <a:r>
+              <a:rPr sz="1400" dirty="0">
+                <a:solidFill>
+                  <a:srgbClr val="2D2D2D"/>
+                </a:solidFill>
+                <a:latin typeface="Consolas"/>
+              </a:rPr>
+              <a:t> on;</a:t>
             </a:r>
           </a:p>
           <a:p>
@@ -6106,7 +7715,7 @@
               </a:spcAft>
             </a:pPr>
             <a:r>
-              <a:rPr sz="1100">
+              <a:rPr sz="1400" dirty="0">
                 <a:solidFill>
                   <a:srgbClr val="2D2D2D"/>
                 </a:solidFill>
@@ -6122,7 +7731,7 @@
               </a:spcAft>
             </a:pPr>
             <a:r>
-              <a:rPr sz="1100">
+              <a:rPr sz="1400" dirty="0">
                 <a:solidFill>
                   <a:srgbClr val="2D2D2D"/>
                 </a:solidFill>
@@ -6138,7 +7747,7 @@
               </a:spcAft>
             </a:pPr>
             <a:r>
-              <a:rPr sz="1100">
+              <a:rPr sz="1400" dirty="0">
                 <a:solidFill>
                   <a:srgbClr val="2D2D2D"/>
                 </a:solidFill>
@@ -6154,13 +7763,31 @@
               </a:spcAft>
             </a:pPr>
             <a:r>
-              <a:rPr sz="1100" i="1">
+              <a:rPr sz="1400" i="1" dirty="0">
                 <a:solidFill>
                   <a:srgbClr val="808080"/>
                 </a:solidFill>
                 <a:latin typeface="Consolas"/>
               </a:rPr>
-              <a:t># 3. In every dev's local.conf:</a:t>
+              <a:t># 3. In every dev's </a:t>
+            </a:r>
+            <a:r>
+              <a:rPr sz="1400" i="1" dirty="0" err="1">
+                <a:solidFill>
+                  <a:srgbClr val="808080"/>
+                </a:solidFill>
+                <a:latin typeface="Consolas"/>
+              </a:rPr>
+              <a:t>local.conf</a:t>
+            </a:r>
+            <a:r>
+              <a:rPr sz="1400" i="1" dirty="0">
+                <a:solidFill>
+                  <a:srgbClr val="808080"/>
+                </a:solidFill>
+                <a:latin typeface="Consolas"/>
+              </a:rPr>
+              <a:t>:</a:t>
             </a:r>
           </a:p>
           <a:p>
@@ -6170,7 +7797,7 @@
               </a:spcAft>
             </a:pPr>
             <a:r>
-              <a:rPr sz="1100">
+              <a:rPr sz="1400" dirty="0">
                 <a:solidFill>
                   <a:srgbClr val="2D2D2D"/>
                 </a:solidFill>
@@ -6186,7 +7813,7 @@
               </a:spcAft>
             </a:pPr>
             <a:r>
-              <a:rPr sz="1100">
+              <a:rPr sz="1400" dirty="0">
                 <a:solidFill>
                   <a:srgbClr val="2D2D2D"/>
                 </a:solidFill>
@@ -6202,7 +7829,7 @@
               </a:spcAft>
             </a:pPr>
             <a:r>
-              <a:rPr sz="1100">
+              <a:rPr sz="1400" dirty="0">
                 <a:solidFill>
                   <a:srgbClr val="2D2D2D"/>
                 </a:solidFill>
@@ -6210,15 +7837,8 @@
               </a:rPr>
               <a:t> </a:t>
             </a:r>
-          </a:p>
-          <a:p>
-            <a:pPr>
-              <a:spcAft>
-                <a:spcPts val="0"/>
-              </a:spcAft>
-            </a:pPr>
-            <a:r>
-              <a:rPr sz="1100" i="1">
+            <a:r>
+              <a:rPr sz="1400" i="1" dirty="0">
                 <a:solidFill>
                   <a:srgbClr val="808080"/>
                 </a:solidFill>
@@ -6237,8 +7857,8 @@
 </p:sld>
 </file>
 
-<file path=ppt/slides/slide12.xml><?xml version="1.0" encoding="utf-8"?>
-<p:sld xmlns:a="http://schemas.openxmlformats.org/drawingml/2006/main" xmlns:p="http://schemas.openxmlformats.org/presentationml/2006/main" xmlns:r="http://schemas.openxmlformats.org/officeDocument/2006/relationships">
+<file path=ppt/slides/slide6.xml><?xml version="1.0" encoding="utf-8"?>
+<p:sld xmlns:a="http://schemas.openxmlformats.org/drawingml/2006/main" xmlns:r="http://schemas.openxmlformats.org/officeDocument/2006/relationships" xmlns:p="http://schemas.openxmlformats.org/presentationml/2006/main">
   <p:cSld>
     <p:spTree>
       <p:nvGrpSpPr>
@@ -6246,7 +7866,14 @@
         <p:cNvGrpSpPr/>
         <p:nvPr/>
       </p:nvGrpSpPr>
-      <p:grpSpPr/>
+      <p:grpSpPr>
+        <a:xfrm>
+          <a:off x="0" y="0"/>
+          <a:ext cx="0" cy="0"/>
+          <a:chOff x="0" y="0"/>
+          <a:chExt cx="0" cy="0"/>
+        </a:xfrm>
+      </p:grpSpPr>
       <p:sp>
         <p:nvSpPr>
           <p:cNvPr id="2" name="Title 1"/>
@@ -6263,10 +7890,7 @@
           <a:lstStyle/>
           <a:p>
             <a:r>
-              <a:rPr sz="3200" b="1">
-                <a:solidFill>
-                  <a:srgbClr val="CC0066"/>
-                </a:solidFill>
+              <a:rPr sz="3200" b="1" dirty="0">
                 <a:latin typeface="Calibri"/>
               </a:rPr>
               <a:t>Parallelism</a:t>
@@ -6291,7 +7915,7 @@
           <a:noFill/>
         </p:spPr>
         <p:txBody>
-          <a:bodyPr wrap="square" anchor="t" lIns="45720" rIns="45720">
+          <a:bodyPr wrap="square" lIns="45720" rIns="45720" anchor="t">
             <a:spAutoFit/>
           </a:bodyPr>
           <a:lstStyle/>
@@ -6318,7 +7942,7 @@
         <p:spPr>
           <a:xfrm>
             <a:off x="822960" y="1783080"/>
-            <a:ext cx="10515600" cy="4572000"/>
+            <a:ext cx="10515600" cy="3790781"/>
           </a:xfrm>
           <a:prstGeom prst="rect">
             <a:avLst/>
@@ -6337,7 +7961,7 @@
               </a:spcAft>
             </a:pPr>
             <a:r>
-              <a:rPr sz="1600" b="1" i="0">
+              <a:rPr sz="2000" b="1" i="0">
                 <a:solidFill>
                   <a:srgbClr val="CC0066"/>
                 </a:solidFill>
@@ -6353,7 +7977,7 @@
               </a:spcAft>
             </a:pPr>
             <a:r>
-              <a:rPr sz="1300" b="0" i="0">
+              <a:rPr sz="1600" b="0" i="0">
                 <a:solidFill>
                   <a:srgbClr val="333333"/>
                 </a:solidFill>
@@ -6369,7 +7993,7 @@
               </a:spcAft>
             </a:pPr>
             <a:r>
-              <a:rPr sz="1300" b="0" i="0">
+              <a:rPr sz="1600" b="0" i="0">
                 <a:solidFill>
                   <a:srgbClr val="333333"/>
                 </a:solidFill>
@@ -6385,7 +8009,7 @@
               </a:spcAft>
             </a:pPr>
             <a:r>
-              <a:rPr sz="1600" b="1" i="0">
+              <a:rPr sz="2000" b="1" i="0">
                 <a:solidFill>
                   <a:srgbClr val="CC0066"/>
                 </a:solidFill>
@@ -6401,7 +8025,7 @@
               </a:spcAft>
             </a:pPr>
             <a:r>
-              <a:rPr sz="1300" b="0" i="0">
+              <a:rPr sz="1600" b="0" i="0">
                 <a:solidFill>
                   <a:srgbClr val="333333"/>
                 </a:solidFill>
@@ -6417,7 +8041,7 @@
               </a:spcAft>
             </a:pPr>
             <a:r>
-              <a:rPr sz="1300" b="0" i="0">
+              <a:rPr sz="1600" b="0" i="0">
                 <a:solidFill>
                   <a:srgbClr val="333333"/>
                 </a:solidFill>
@@ -6433,7 +8057,7 @@
               </a:spcAft>
             </a:pPr>
             <a:r>
-              <a:rPr sz="1600" b="1" i="0">
+              <a:rPr sz="2000" b="1" i="0">
                 <a:solidFill>
                   <a:srgbClr val="663399"/>
                 </a:solidFill>
@@ -6449,7 +8073,7 @@
               </a:spcAft>
             </a:pPr>
             <a:r>
-              <a:rPr sz="1300" b="0" i="0">
+              <a:rPr sz="1600" b="0" i="0">
                 <a:solidFill>
                   <a:srgbClr val="333333"/>
                 </a:solidFill>
@@ -6465,7 +8089,7 @@
               </a:spcAft>
             </a:pPr>
             <a:r>
-              <a:rPr sz="1600" b="1" i="0">
+              <a:rPr sz="2000" b="1" i="0">
                 <a:solidFill>
                   <a:srgbClr val="663399"/>
                 </a:solidFill>
@@ -6481,7 +8105,7 @@
               </a:spcAft>
             </a:pPr>
             <a:r>
-              <a:rPr sz="1300" b="0" i="0">
+              <a:rPr sz="1600" b="0" i="0">
                 <a:solidFill>
                   <a:srgbClr val="333333"/>
                 </a:solidFill>
@@ -6497,7 +8121,7 @@
               </a:spcAft>
             </a:pPr>
             <a:r>
-              <a:rPr sz="1300" b="0" i="0">
+              <a:rPr sz="1600" b="0" i="0">
                 <a:solidFill>
                   <a:srgbClr val="333333"/>
                 </a:solidFill>
@@ -6516,8 +8140,8 @@
 </p:sld>
 </file>
 
-<file path=ppt/slides/slide13.xml><?xml version="1.0" encoding="utf-8"?>
-<p:sld xmlns:a="http://schemas.openxmlformats.org/drawingml/2006/main" xmlns:p="http://schemas.openxmlformats.org/presentationml/2006/main" xmlns:r="http://schemas.openxmlformats.org/officeDocument/2006/relationships">
+<file path=ppt/slides/slide7.xml><?xml version="1.0" encoding="utf-8"?>
+<p:sld xmlns:a="http://schemas.openxmlformats.org/drawingml/2006/main" xmlns:r="http://schemas.openxmlformats.org/officeDocument/2006/relationships" xmlns:p="http://schemas.openxmlformats.org/presentationml/2006/main">
   <p:cSld>
     <p:spTree>
       <p:nvGrpSpPr>
@@ -6525,7 +8149,14 @@
         <p:cNvGrpSpPr/>
         <p:nvPr/>
       </p:nvGrpSpPr>
-      <p:grpSpPr/>
+      <p:grpSpPr>
+        <a:xfrm>
+          <a:off x="0" y="0"/>
+          <a:ext cx="0" cy="0"/>
+          <a:chOff x="0" y="0"/>
+          <a:chExt cx="0" cy="0"/>
+        </a:xfrm>
+      </p:grpSpPr>
       <p:sp>
         <p:nvSpPr>
           <p:cNvPr id="2" name="Title 1"/>
@@ -6542,10 +8173,7 @@
           <a:lstStyle/>
           <a:p>
             <a:r>
-              <a:rPr sz="3200" b="1">
-                <a:solidFill>
-                  <a:srgbClr val="CC0066"/>
-                </a:solidFill>
+              <a:rPr sz="3200" b="1" dirty="0">
                 <a:latin typeface="Calibri"/>
               </a:rPr>
               <a:t>Avoiding OOM and Thrashing</a:t>
@@ -6570,7 +8198,7 @@
           <a:noFill/>
         </p:spPr>
         <p:txBody>
-          <a:bodyPr wrap="square" anchor="t" lIns="45720" rIns="45720">
+          <a:bodyPr wrap="square" lIns="45720" rIns="45720" anchor="t">
             <a:spAutoFit/>
           </a:bodyPr>
           <a:lstStyle/>
@@ -6631,6 +8259,7 @@
           <a:lstStyle/>
           <a:p>
             <a:pPr algn="ctr"/>
+            <a:endParaRPr/>
           </a:p>
         </p:txBody>
       </p:sp>
@@ -6675,6 +8304,7 @@
           <a:lstStyle/>
           <a:p>
             <a:pPr algn="ctr"/>
+            <a:endParaRPr/>
           </a:p>
         </p:txBody>
       </p:sp>
@@ -6687,7 +8317,7 @@
         <p:spPr>
           <a:xfrm>
             <a:off x="1005840" y="1874519"/>
-            <a:ext cx="10241280" cy="4389120"/>
+            <a:ext cx="10241280" cy="4401205"/>
           </a:xfrm>
           <a:prstGeom prst="rect">
             <a:avLst/>
@@ -6706,7 +8336,7 @@
               </a:spcAft>
             </a:pPr>
             <a:r>
-              <a:rPr sz="1100" i="1">
+              <a:rPr sz="1400" i="1">
                 <a:solidFill>
                   <a:srgbClr val="808080"/>
                 </a:solidFill>
@@ -6722,7 +8352,7 @@
               </a:spcAft>
             </a:pPr>
             <a:r>
-              <a:rPr sz="1100">
+              <a:rPr sz="1400">
                 <a:solidFill>
                   <a:srgbClr val="2D2D2D"/>
                 </a:solidFill>
@@ -6738,7 +8368,7 @@
               </a:spcAft>
             </a:pPr>
             <a:r>
-              <a:rPr sz="1100">
+              <a:rPr sz="1400">
                 <a:solidFill>
                   <a:srgbClr val="2D2D2D"/>
                 </a:solidFill>
@@ -6754,7 +8384,7 @@
               </a:spcAft>
             </a:pPr>
             <a:r>
-              <a:rPr sz="1100">
+              <a:rPr sz="1400">
                 <a:solidFill>
                   <a:srgbClr val="2D2D2D"/>
                 </a:solidFill>
@@ -6770,7 +8400,7 @@
               </a:spcAft>
             </a:pPr>
             <a:r>
-              <a:rPr sz="1100">
+              <a:rPr sz="1400">
                 <a:solidFill>
                   <a:srgbClr val="2D2D2D"/>
                 </a:solidFill>
@@ -6786,7 +8416,7 @@
               </a:spcAft>
             </a:pPr>
             <a:r>
-              <a:rPr sz="1100" i="1">
+              <a:rPr sz="1400" i="1">
                 <a:solidFill>
                   <a:srgbClr val="808080"/>
                 </a:solidFill>
@@ -6802,7 +8432,7 @@
               </a:spcAft>
             </a:pPr>
             <a:r>
-              <a:rPr sz="1100" i="1">
+              <a:rPr sz="1400" i="1">
                 <a:solidFill>
                   <a:srgbClr val="808080"/>
                 </a:solidFill>
@@ -6818,7 +8448,7 @@
               </a:spcAft>
             </a:pPr>
             <a:r>
-              <a:rPr sz="1100" i="1">
+              <a:rPr sz="1400" i="1">
                 <a:solidFill>
                   <a:srgbClr val="808080"/>
                 </a:solidFill>
@@ -6834,7 +8464,7 @@
               </a:spcAft>
             </a:pPr>
             <a:r>
-              <a:rPr sz="1100" i="1">
+              <a:rPr sz="1400" i="1">
                 <a:solidFill>
                   <a:srgbClr val="808080"/>
                 </a:solidFill>
@@ -6850,7 +8480,7 @@
               </a:spcAft>
             </a:pPr>
             <a:r>
-              <a:rPr sz="1100" i="1">
+              <a:rPr sz="1400" i="1">
                 <a:solidFill>
                   <a:srgbClr val="808080"/>
                 </a:solidFill>
@@ -6866,7 +8496,7 @@
               </a:spcAft>
             </a:pPr>
             <a:r>
-              <a:rPr sz="1100">
+              <a:rPr sz="1400">
                 <a:solidFill>
                   <a:srgbClr val="2D2D2D"/>
                 </a:solidFill>
@@ -6882,7 +8512,7 @@
               </a:spcAft>
             </a:pPr>
             <a:r>
-              <a:rPr sz="1100" i="1">
+              <a:rPr sz="1400" i="1">
                 <a:solidFill>
                   <a:srgbClr val="808080"/>
                 </a:solidFill>
@@ -6898,7 +8528,7 @@
               </a:spcAft>
             </a:pPr>
             <a:r>
-              <a:rPr sz="1100">
+              <a:rPr sz="1400">
                 <a:solidFill>
                   <a:srgbClr val="2D2D2D"/>
                 </a:solidFill>
@@ -6914,7 +8544,7 @@
               </a:spcAft>
             </a:pPr>
             <a:r>
-              <a:rPr sz="1100">
+              <a:rPr sz="1400">
                 <a:solidFill>
                   <a:srgbClr val="2D2D2D"/>
                 </a:solidFill>
@@ -6930,7 +8560,7 @@
               </a:spcAft>
             </a:pPr>
             <a:r>
-              <a:rPr sz="1100">
+              <a:rPr sz="1400">
                 <a:solidFill>
                   <a:srgbClr val="2D2D2D"/>
                 </a:solidFill>
@@ -6946,7 +8576,7 @@
               </a:spcAft>
             </a:pPr>
             <a:r>
-              <a:rPr sz="1100" i="1">
+              <a:rPr sz="1400" i="1">
                 <a:solidFill>
                   <a:srgbClr val="808080"/>
                 </a:solidFill>
@@ -6962,7 +8592,7 @@
               </a:spcAft>
             </a:pPr>
             <a:r>
-              <a:rPr sz="1100">
+              <a:rPr sz="1400">
                 <a:solidFill>
                   <a:srgbClr val="2D2D2D"/>
                 </a:solidFill>
@@ -6978,7 +8608,7 @@
               </a:spcAft>
             </a:pPr>
             <a:r>
-              <a:rPr sz="1100">
+              <a:rPr sz="1400">
                 <a:solidFill>
                   <a:srgbClr val="2D2D2D"/>
                 </a:solidFill>
@@ -6994,7 +8624,7 @@
               </a:spcAft>
             </a:pPr>
             <a:r>
-              <a:rPr sz="1100" i="1">
+              <a:rPr sz="1400" i="1">
                 <a:solidFill>
                   <a:srgbClr val="808080"/>
                 </a:solidFill>
@@ -7010,7 +8640,7 @@
               </a:spcAft>
             </a:pPr>
             <a:r>
-              <a:rPr sz="1100">
+              <a:rPr sz="1400">
                 <a:solidFill>
                   <a:srgbClr val="2D2D2D"/>
                 </a:solidFill>
@@ -7029,8 +8659,8 @@
 </p:sld>
 </file>
 
-<file path=ppt/slides/slide14.xml><?xml version="1.0" encoding="utf-8"?>
-<p:sld xmlns:a="http://schemas.openxmlformats.org/drawingml/2006/main" xmlns:p="http://schemas.openxmlformats.org/presentationml/2006/main" xmlns:r="http://schemas.openxmlformats.org/officeDocument/2006/relationships">
+<file path=ppt/slides/slide8.xml><?xml version="1.0" encoding="utf-8"?>
+<p:sld xmlns:a="http://schemas.openxmlformats.org/drawingml/2006/main" xmlns:r="http://schemas.openxmlformats.org/officeDocument/2006/relationships" xmlns:p="http://schemas.openxmlformats.org/presentationml/2006/main">
   <p:cSld>
     <p:spTree>
       <p:nvGrpSpPr>
@@ -7038,7 +8668,14 @@
         <p:cNvGrpSpPr/>
         <p:nvPr/>
       </p:nvGrpSpPr>
-      <p:grpSpPr/>
+      <p:grpSpPr>
+        <a:xfrm>
+          <a:off x="0" y="0"/>
+          <a:ext cx="0" cy="0"/>
+          <a:chOff x="0" y="0"/>
+          <a:chExt cx="0" cy="0"/>
+        </a:xfrm>
+      </p:grpSpPr>
       <p:sp>
         <p:nvSpPr>
           <p:cNvPr id="2" name="Title 1"/>
@@ -7055,10 +8692,7 @@
           <a:lstStyle/>
           <a:p>
             <a:r>
-              <a:rPr sz="3200" b="1">
-                <a:solidFill>
-                  <a:srgbClr val="CC0066"/>
-                </a:solidFill>
+              <a:rPr sz="3200" b="1" dirty="0">
                 <a:latin typeface="Calibri"/>
               </a:rPr>
               <a:t>Hash Equivalence</a:t>
@@ -7083,7 +8717,7 @@
           <a:noFill/>
         </p:spPr>
         <p:txBody>
-          <a:bodyPr wrap="square" anchor="t" lIns="45720" rIns="45720">
+          <a:bodyPr wrap="square" lIns="45720" rIns="45720" anchor="t">
             <a:spAutoFit/>
           </a:bodyPr>
           <a:lstStyle/>
@@ -7110,7 +8744,7 @@
         <p:spPr>
           <a:xfrm>
             <a:off x="822960" y="1783080"/>
-            <a:ext cx="10515600" cy="4572000"/>
+            <a:ext cx="10515600" cy="3913892"/>
           </a:xfrm>
           <a:prstGeom prst="rect">
             <a:avLst/>
@@ -7129,7 +8763,7 @@
               </a:spcAft>
             </a:pPr>
             <a:r>
-              <a:rPr sz="1500" b="1" i="0">
+              <a:rPr b="1" i="0" dirty="0">
                 <a:solidFill>
                   <a:srgbClr val="CC0066"/>
                 </a:solidFill>
@@ -7145,7 +8779,7 @@
               </a:spcAft>
             </a:pPr>
             <a:r>
-              <a:rPr sz="1300" b="0" i="0">
+              <a:rPr sz="1600" b="0" i="0" dirty="0">
                 <a:solidFill>
                   <a:srgbClr val="333333"/>
                 </a:solidFill>
@@ -7161,7 +8795,7 @@
               </a:spcAft>
             </a:pPr>
             <a:r>
-              <a:rPr sz="1500" b="1" i="0">
+              <a:rPr b="1" i="0" dirty="0">
                 <a:solidFill>
                   <a:srgbClr val="CC0066"/>
                 </a:solidFill>
@@ -7177,7 +8811,7 @@
               </a:spcAft>
             </a:pPr>
             <a:r>
-              <a:rPr sz="1300" b="0" i="0">
+              <a:rPr sz="1600" b="0" i="0" dirty="0">
                 <a:solidFill>
                   <a:srgbClr val="333333"/>
                 </a:solidFill>
@@ -7193,7 +8827,7 @@
               </a:spcAft>
             </a:pPr>
             <a:r>
-              <a:rPr sz="1500" b="1" i="0">
+              <a:rPr b="1" i="0" dirty="0">
                 <a:solidFill>
                   <a:srgbClr val="CC0066"/>
                 </a:solidFill>
@@ -7209,13 +8843,31 @@
               </a:spcAft>
             </a:pPr>
             <a:r>
-              <a:rPr sz="1300" b="0" i="0">
+              <a:rPr sz="1600" b="0" i="0" dirty="0">
                 <a:solidFill>
                   <a:srgbClr val="333333"/>
                 </a:solidFill>
                 <a:latin typeface="Calibri"/>
               </a:rPr>
-              <a:t>In local.conf:</a:t>
+              <a:t>In </a:t>
+            </a:r>
+            <a:r>
+              <a:rPr sz="1600" b="0" i="0" dirty="0" err="1">
+                <a:solidFill>
+                  <a:srgbClr val="333333"/>
+                </a:solidFill>
+                <a:latin typeface="Calibri"/>
+              </a:rPr>
+              <a:t>local.conf</a:t>
+            </a:r>
+            <a:r>
+              <a:rPr sz="1600" b="0" i="0" dirty="0">
+                <a:solidFill>
+                  <a:srgbClr val="333333"/>
+                </a:solidFill>
+                <a:latin typeface="Calibri"/>
+              </a:rPr>
+              <a:t>:</a:t>
             </a:r>
           </a:p>
           <a:p>
@@ -7225,13 +8877,31 @@
               </a:spcAft>
             </a:pPr>
             <a:r>
-              <a:rPr sz="1200" b="0" i="0">
+              <a:rPr sz="1600" b="0" i="0" dirty="0">
                 <a:solidFill>
                   <a:srgbClr val="333333"/>
                 </a:solidFill>
                 <a:latin typeface="Consolas"/>
               </a:rPr>
-              <a:t>BB_SIGNATURE_HANDLER = "OEEquivHash"</a:t>
+              <a:t>BB_SIGNATURE_HANDLER = "</a:t>
+            </a:r>
+            <a:r>
+              <a:rPr sz="1600" b="0" i="0" dirty="0" err="1">
+                <a:solidFill>
+                  <a:srgbClr val="333333"/>
+                </a:solidFill>
+                <a:latin typeface="Consolas"/>
+              </a:rPr>
+              <a:t>OEEquivHash</a:t>
+            </a:r>
+            <a:r>
+              <a:rPr sz="1600" b="0" i="0" dirty="0">
+                <a:solidFill>
+                  <a:srgbClr val="333333"/>
+                </a:solidFill>
+                <a:latin typeface="Consolas"/>
+              </a:rPr>
+              <a:t>"</a:t>
             </a:r>
           </a:p>
           <a:p>
@@ -7241,7 +8911,7 @@
               </a:spcAft>
             </a:pPr>
             <a:r>
-              <a:rPr sz="1200" b="0" i="0">
+              <a:rPr sz="1600" b="0" i="0" dirty="0">
                 <a:solidFill>
                   <a:srgbClr val="333333"/>
                 </a:solidFill>
@@ -7257,7 +8927,7 @@
               </a:spcAft>
             </a:pPr>
             <a:r>
-              <a:rPr sz="1200" b="0" i="0">
+              <a:rPr sz="1600" b="0" i="0" dirty="0">
                 <a:solidFill>
                   <a:srgbClr val="333333"/>
                 </a:solidFill>
@@ -7273,7 +8943,7 @@
               </a:spcAft>
             </a:pPr>
             <a:r>
-              <a:rPr sz="1500" b="1" i="0">
+              <a:rPr b="1" i="0" dirty="0">
                 <a:solidFill>
                   <a:srgbClr val="663399"/>
                 </a:solidFill>
@@ -7289,7 +8959,7 @@
               </a:spcAft>
             </a:pPr>
             <a:r>
-              <a:rPr sz="1300" b="0" i="0">
+              <a:rPr sz="1600" b="0" i="0" dirty="0">
                 <a:solidFill>
                   <a:srgbClr val="333333"/>
                 </a:solidFill>
@@ -7308,8 +8978,8 @@
 </p:sld>
 </file>
 
-<file path=ppt/slides/slide15.xml><?xml version="1.0" encoding="utf-8"?>
-<p:sld xmlns:a="http://schemas.openxmlformats.org/drawingml/2006/main" xmlns:p="http://schemas.openxmlformats.org/presentationml/2006/main" xmlns:r="http://schemas.openxmlformats.org/officeDocument/2006/relationships">
+<file path=ppt/slides/slide9.xml><?xml version="1.0" encoding="utf-8"?>
+<p:sld xmlns:a="http://schemas.openxmlformats.org/drawingml/2006/main" xmlns:r="http://schemas.openxmlformats.org/officeDocument/2006/relationships" xmlns:p="http://schemas.openxmlformats.org/presentationml/2006/main">
   <p:cSld>
     <p:spTree>
       <p:nvGrpSpPr>
@@ -7317,7 +8987,14 @@
         <p:cNvGrpSpPr/>
         <p:nvPr/>
       </p:nvGrpSpPr>
-      <p:grpSpPr/>
+      <p:grpSpPr>
+        <a:xfrm>
+          <a:off x="0" y="0"/>
+          <a:ext cx="0" cy="0"/>
+          <a:chOff x="0" y="0"/>
+          <a:chExt cx="0" cy="0"/>
+        </a:xfrm>
+      </p:grpSpPr>
       <p:sp>
         <p:nvSpPr>
           <p:cNvPr id="2" name="Title 1"/>
@@ -7334,10 +9011,7 @@
           <a:lstStyle/>
           <a:p>
             <a:r>
-              <a:rPr sz="3200" b="1">
-                <a:solidFill>
-                  <a:srgbClr val="CC0066"/>
-                </a:solidFill>
+              <a:rPr sz="3200" b="1" dirty="0">
                 <a:latin typeface="Calibri"/>
               </a:rPr>
               <a:t>Measuring What's Slow</a:t>
@@ -7362,7 +9036,7 @@
           <a:noFill/>
         </p:spPr>
         <p:txBody>
-          <a:bodyPr wrap="square" anchor="t" lIns="45720" rIns="45720">
+          <a:bodyPr wrap="square" lIns="45720" rIns="45720" anchor="t">
             <a:spAutoFit/>
           </a:bodyPr>
           <a:lstStyle/>
@@ -7423,6 +9097,7 @@
           <a:lstStyle/>
           <a:p>
             <a:pPr algn="ctr"/>
+            <a:endParaRPr/>
           </a:p>
         </p:txBody>
       </p:sp>
@@ -7467,6 +9142,7 @@
           <a:lstStyle/>
           <a:p>
             <a:pPr algn="ctr"/>
+            <a:endParaRPr/>
           </a:p>
         </p:txBody>
       </p:sp>
@@ -7777,1289 +9453,6 @@
                 <a:latin typeface="Consolas"/>
               </a:rPr>
               <a:t>#   do_fetch from slow remotes (use mirrors)</a:t>
-            </a:r>
-          </a:p>
-        </p:txBody>
-      </p:sp>
-    </p:spTree>
-  </p:cSld>
-  <p:clrMapOvr>
-    <a:masterClrMapping/>
-  </p:clrMapOvr>
-</p:sld>
-</file>
-
-<file path=ppt/slides/slide16.xml><?xml version="1.0" encoding="utf-8"?>
-<p:sld xmlns:a="http://schemas.openxmlformats.org/drawingml/2006/main" xmlns:p="http://schemas.openxmlformats.org/presentationml/2006/main" xmlns:r="http://schemas.openxmlformats.org/officeDocument/2006/relationships">
-  <p:cSld>
-    <p:spTree>
-      <p:nvGrpSpPr>
-        <p:cNvPr id="1" name=""/>
-        <p:cNvGrpSpPr/>
-        <p:nvPr/>
-      </p:nvGrpSpPr>
-      <p:grpSpPr/>
-      <p:sp>
-        <p:nvSpPr>
-          <p:cNvPr id="2" name="Title 1"/>
-          <p:cNvSpPr>
-            <a:spLocks noGrp="1"/>
-          </p:cNvSpPr>
-          <p:nvPr>
-            <p:ph type="title"/>
-          </p:nvPr>
-        </p:nvSpPr>
-        <p:spPr/>
-        <p:txBody>
-          <a:bodyPr/>
-          <a:lstStyle/>
-          <a:p>
-            <a:r>
-              <a:rPr sz="3200" b="1">
-                <a:solidFill>
-                  <a:srgbClr val="663399"/>
-                </a:solidFill>
-                <a:latin typeface="Calibri"/>
-              </a:rPr>
-              <a:t>Session Summary</a:t>
-            </a:r>
-          </a:p>
-        </p:txBody>
-      </p:sp>
-      <p:sp>
-        <p:nvSpPr>
-          <p:cNvPr id="3" name="TextBox 2"/>
-          <p:cNvSpPr txBox="1"/>
-          <p:nvPr/>
-        </p:nvSpPr>
-        <p:spPr>
-          <a:xfrm>
-            <a:off x="822960" y="1417320"/>
-            <a:ext cx="10515600" cy="365760"/>
-          </a:xfrm>
-          <a:prstGeom prst="rect">
-            <a:avLst/>
-          </a:prstGeom>
-          <a:noFill/>
-        </p:spPr>
-        <p:txBody>
-          <a:bodyPr wrap="square" anchor="t" lIns="45720" rIns="45720">
-            <a:spAutoFit/>
-          </a:bodyPr>
-          <a:lstStyle/>
-          <a:p>
-            <a:pPr algn="l"/>
-            <a:r>
-              <a:rPr sz="1500" b="0" i="1">
-                <a:solidFill>
-                  <a:srgbClr val="666666"/>
-                </a:solidFill>
-                <a:latin typeface="Calibri"/>
-              </a:rPr>
-              <a:t>5 things to remember from this session.</a:t>
-            </a:r>
-          </a:p>
-        </p:txBody>
-      </p:sp>
-      <p:sp>
-        <p:nvSpPr>
-          <p:cNvPr id="4" name="Rounded Rectangle 3"/>
-          <p:cNvSpPr/>
-          <p:nvPr/>
-        </p:nvSpPr>
-        <p:spPr>
-          <a:xfrm>
-            <a:off x="822960" y="1874519"/>
-            <a:ext cx="457200" cy="548640"/>
-          </a:xfrm>
-          <a:prstGeom prst="roundRect">
-            <a:avLst/>
-          </a:prstGeom>
-          <a:solidFill>
-            <a:srgbClr val="CC0066"/>
-          </a:solidFill>
-          <a:ln>
-            <a:noFill/>
-          </a:ln>
-          <a:effectLst/>
-        </p:spPr>
-        <p:style>
-          <a:lnRef idx="1">
-            <a:schemeClr val="accent1"/>
-          </a:lnRef>
-          <a:fillRef idx="3">
-            <a:schemeClr val="accent1"/>
-          </a:fillRef>
-          <a:effectRef idx="2">
-            <a:schemeClr val="accent1"/>
-          </a:effectRef>
-          <a:fontRef idx="minor">
-            <a:schemeClr val="lt1"/>
-          </a:fontRef>
-        </p:style>
-        <p:txBody>
-          <a:bodyPr rtlCol="0" anchor="ctr" lIns="0" rIns="0"/>
-          <a:lstStyle/>
-          <a:p>
-            <a:pPr algn="ctr"/>
-            <a:r>
-              <a:rPr sz="2200" b="1">
-                <a:solidFill>
-                  <a:srgbClr val="FFFFFF"/>
-                </a:solidFill>
-                <a:latin typeface="Calibri"/>
-              </a:rPr>
-              <a:t>1</a:t>
-            </a:r>
-          </a:p>
-        </p:txBody>
-      </p:sp>
-      <p:sp>
-        <p:nvSpPr>
-          <p:cNvPr id="5" name="TextBox 4"/>
-          <p:cNvSpPr txBox="1"/>
-          <p:nvPr/>
-        </p:nvSpPr>
-        <p:spPr>
-          <a:xfrm>
-            <a:off x="1417320" y="1874519"/>
-            <a:ext cx="10058400" cy="320040"/>
-          </a:xfrm>
-          <a:prstGeom prst="rect">
-            <a:avLst/>
-          </a:prstGeom>
-          <a:noFill/>
-        </p:spPr>
-        <p:txBody>
-          <a:bodyPr wrap="square" anchor="t" lIns="45720" rIns="45720">
-            <a:spAutoFit/>
-          </a:bodyPr>
-          <a:lstStyle/>
-          <a:p>
-            <a:pPr algn="l"/>
-            <a:r>
-              <a:rPr sz="1600" b="1" i="0">
-                <a:solidFill>
-                  <a:srgbClr val="663399"/>
-                </a:solidFill>
-                <a:latin typeface="Calibri"/>
-              </a:rPr>
-              <a:t>sstate cache turns slow builds into fast ones</a:t>
-            </a:r>
-          </a:p>
-        </p:txBody>
-      </p:sp>
-      <p:sp>
-        <p:nvSpPr>
-          <p:cNvPr id="6" name="TextBox 5"/>
-          <p:cNvSpPr txBox="1"/>
-          <p:nvPr/>
-        </p:nvSpPr>
-        <p:spPr>
-          <a:xfrm>
-            <a:off x="1417320" y="2185415"/>
-            <a:ext cx="10058400" cy="320040"/>
-          </a:xfrm>
-          <a:prstGeom prst="rect">
-            <a:avLst/>
-          </a:prstGeom>
-          <a:noFill/>
-        </p:spPr>
-        <p:txBody>
-          <a:bodyPr wrap="square" anchor="t" lIns="45720" rIns="45720">
-            <a:spAutoFit/>
-          </a:bodyPr>
-          <a:lstStyle/>
-          <a:p>
-            <a:pPr algn="l"/>
-            <a:r>
-              <a:rPr sz="1300" b="0" i="0">
-                <a:solidFill>
-                  <a:srgbClr val="333333"/>
-                </a:solidFill>
-                <a:latin typeface="Calibri"/>
-              </a:rPr>
-              <a:t>Every task hashed; matching hash = skip the task</a:t>
-            </a:r>
-          </a:p>
-        </p:txBody>
-      </p:sp>
-      <p:sp>
-        <p:nvSpPr>
-          <p:cNvPr id="7" name="Rounded Rectangle 6"/>
-          <p:cNvSpPr/>
-          <p:nvPr/>
-        </p:nvSpPr>
-        <p:spPr>
-          <a:xfrm>
-            <a:off x="822960" y="2587752"/>
-            <a:ext cx="457200" cy="548640"/>
-          </a:xfrm>
-          <a:prstGeom prst="roundRect">
-            <a:avLst/>
-          </a:prstGeom>
-          <a:solidFill>
-            <a:srgbClr val="CC0066"/>
-          </a:solidFill>
-          <a:ln>
-            <a:noFill/>
-          </a:ln>
-          <a:effectLst/>
-        </p:spPr>
-        <p:style>
-          <a:lnRef idx="1">
-            <a:schemeClr val="accent1"/>
-          </a:lnRef>
-          <a:fillRef idx="3">
-            <a:schemeClr val="accent1"/>
-          </a:fillRef>
-          <a:effectRef idx="2">
-            <a:schemeClr val="accent1"/>
-          </a:effectRef>
-          <a:fontRef idx="minor">
-            <a:schemeClr val="lt1"/>
-          </a:fontRef>
-        </p:style>
-        <p:txBody>
-          <a:bodyPr rtlCol="0" anchor="ctr" lIns="0" rIns="0"/>
-          <a:lstStyle/>
-          <a:p>
-            <a:pPr algn="ctr"/>
-            <a:r>
-              <a:rPr sz="2200" b="1">
-                <a:solidFill>
-                  <a:srgbClr val="FFFFFF"/>
-                </a:solidFill>
-                <a:latin typeface="Calibri"/>
-              </a:rPr>
-              <a:t>2</a:t>
-            </a:r>
-          </a:p>
-        </p:txBody>
-      </p:sp>
-      <p:sp>
-        <p:nvSpPr>
-          <p:cNvPr id="8" name="TextBox 7"/>
-          <p:cNvSpPr txBox="1"/>
-          <p:nvPr/>
-        </p:nvSpPr>
-        <p:spPr>
-          <a:xfrm>
-            <a:off x="1417320" y="2587752"/>
-            <a:ext cx="10058400" cy="320040"/>
-          </a:xfrm>
-          <a:prstGeom prst="rect">
-            <a:avLst/>
-          </a:prstGeom>
-          <a:noFill/>
-        </p:spPr>
-        <p:txBody>
-          <a:bodyPr wrap="square" anchor="t" lIns="45720" rIns="45720">
-            <a:spAutoFit/>
-          </a:bodyPr>
-          <a:lstStyle/>
-          <a:p>
-            <a:pPr algn="l"/>
-            <a:r>
-              <a:rPr sz="1600" b="1" i="0">
-                <a:solidFill>
-                  <a:srgbClr val="663399"/>
-                </a:solidFill>
-                <a:latin typeface="Calibri"/>
-              </a:rPr>
-              <a:t>Shared mirrors make sstate a team asset</a:t>
-            </a:r>
-          </a:p>
-        </p:txBody>
-      </p:sp>
-      <p:sp>
-        <p:nvSpPr>
-          <p:cNvPr id="9" name="TextBox 8"/>
-          <p:cNvSpPr txBox="1"/>
-          <p:nvPr/>
-        </p:nvSpPr>
-        <p:spPr>
-          <a:xfrm>
-            <a:off x="1417320" y="2898648"/>
-            <a:ext cx="10058400" cy="320040"/>
-          </a:xfrm>
-          <a:prstGeom prst="rect">
-            <a:avLst/>
-          </a:prstGeom>
-          <a:noFill/>
-        </p:spPr>
-        <p:txBody>
-          <a:bodyPr wrap="square" anchor="t" lIns="45720" rIns="45720">
-            <a:spAutoFit/>
-          </a:bodyPr>
-          <a:lstStyle/>
-          <a:p>
-            <a:pPr algn="l"/>
-            <a:r>
-              <a:rPr sz="1300" b="0" i="0">
-                <a:solidFill>
-                  <a:srgbClr val="333333"/>
-                </a:solidFill>
-                <a:latin typeface="Calibri"/>
-              </a:rPr>
-              <a:t>One CI build benefits everyone; setup is just an HTTP server</a:t>
-            </a:r>
-          </a:p>
-        </p:txBody>
-      </p:sp>
-      <p:sp>
-        <p:nvSpPr>
-          <p:cNvPr id="10" name="Rounded Rectangle 9"/>
-          <p:cNvSpPr/>
-          <p:nvPr/>
-        </p:nvSpPr>
-        <p:spPr>
-          <a:xfrm>
-            <a:off x="822960" y="3300984"/>
-            <a:ext cx="457200" cy="548640"/>
-          </a:xfrm>
-          <a:prstGeom prst="roundRect">
-            <a:avLst/>
-          </a:prstGeom>
-          <a:solidFill>
-            <a:srgbClr val="CC0066"/>
-          </a:solidFill>
-          <a:ln>
-            <a:noFill/>
-          </a:ln>
-          <a:effectLst/>
-        </p:spPr>
-        <p:style>
-          <a:lnRef idx="1">
-            <a:schemeClr val="accent1"/>
-          </a:lnRef>
-          <a:fillRef idx="3">
-            <a:schemeClr val="accent1"/>
-          </a:fillRef>
-          <a:effectRef idx="2">
-            <a:schemeClr val="accent1"/>
-          </a:effectRef>
-          <a:fontRef idx="minor">
-            <a:schemeClr val="lt1"/>
-          </a:fontRef>
-        </p:style>
-        <p:txBody>
-          <a:bodyPr rtlCol="0" anchor="ctr" lIns="0" rIns="0"/>
-          <a:lstStyle/>
-          <a:p>
-            <a:pPr algn="ctr"/>
-            <a:r>
-              <a:rPr sz="2200" b="1">
-                <a:solidFill>
-                  <a:srgbClr val="FFFFFF"/>
-                </a:solidFill>
-                <a:latin typeface="Calibri"/>
-              </a:rPr>
-              <a:t>3</a:t>
-            </a:r>
-          </a:p>
-        </p:txBody>
-      </p:sp>
-      <p:sp>
-        <p:nvSpPr>
-          <p:cNvPr id="11" name="TextBox 10"/>
-          <p:cNvSpPr txBox="1"/>
-          <p:nvPr/>
-        </p:nvSpPr>
-        <p:spPr>
-          <a:xfrm>
-            <a:off x="1417320" y="3300984"/>
-            <a:ext cx="10058400" cy="320040"/>
-          </a:xfrm>
-          <a:prstGeom prst="rect">
-            <a:avLst/>
-          </a:prstGeom>
-          <a:noFill/>
-        </p:spPr>
-        <p:txBody>
-          <a:bodyPr wrap="square" anchor="t" lIns="45720" rIns="45720">
-            <a:spAutoFit/>
-          </a:bodyPr>
-          <a:lstStyle/>
-          <a:p>
-            <a:pPr algn="l"/>
-            <a:r>
-              <a:rPr sz="1600" b="1" i="0">
-                <a:solidFill>
-                  <a:srgbClr val="663399"/>
-                </a:solidFill>
-                <a:latin typeface="Calibri"/>
-              </a:rPr>
-              <a:t>Parallelism × Make threads can OOM you</a:t>
-            </a:r>
-          </a:p>
-        </p:txBody>
-      </p:sp>
-      <p:sp>
-        <p:nvSpPr>
-          <p:cNvPr id="12" name="TextBox 11"/>
-          <p:cNvSpPr txBox="1"/>
-          <p:nvPr/>
-        </p:nvSpPr>
-        <p:spPr>
-          <a:xfrm>
-            <a:off x="1417320" y="3611879"/>
-            <a:ext cx="10058400" cy="320040"/>
-          </a:xfrm>
-          <a:prstGeom prst="rect">
-            <a:avLst/>
-          </a:prstGeom>
-          <a:noFill/>
-        </p:spPr>
-        <p:txBody>
-          <a:bodyPr wrap="square" anchor="t" lIns="45720" rIns="45720">
-            <a:spAutoFit/>
-          </a:bodyPr>
-          <a:lstStyle/>
-          <a:p>
-            <a:pPr algn="l"/>
-            <a:r>
-              <a:rPr sz="1300" b="0" i="0">
-                <a:solidFill>
-                  <a:srgbClr val="333333"/>
-                </a:solidFill>
-                <a:latin typeface="Calibri"/>
-              </a:rPr>
-              <a:t>BB_NUMBER_THREADS × PARALLEL_MAKE ≈ cores × 2 ceiling</a:t>
-            </a:r>
-          </a:p>
-        </p:txBody>
-      </p:sp>
-      <p:sp>
-        <p:nvSpPr>
-          <p:cNvPr id="13" name="Rounded Rectangle 12"/>
-          <p:cNvSpPr/>
-          <p:nvPr/>
-        </p:nvSpPr>
-        <p:spPr>
-          <a:xfrm>
-            <a:off x="822960" y="4014215"/>
-            <a:ext cx="457200" cy="548640"/>
-          </a:xfrm>
-          <a:prstGeom prst="roundRect">
-            <a:avLst/>
-          </a:prstGeom>
-          <a:solidFill>
-            <a:srgbClr val="CC0066"/>
-          </a:solidFill>
-          <a:ln>
-            <a:noFill/>
-          </a:ln>
-          <a:effectLst/>
-        </p:spPr>
-        <p:style>
-          <a:lnRef idx="1">
-            <a:schemeClr val="accent1"/>
-          </a:lnRef>
-          <a:fillRef idx="3">
-            <a:schemeClr val="accent1"/>
-          </a:fillRef>
-          <a:effectRef idx="2">
-            <a:schemeClr val="accent1"/>
-          </a:effectRef>
-          <a:fontRef idx="minor">
-            <a:schemeClr val="lt1"/>
-          </a:fontRef>
-        </p:style>
-        <p:txBody>
-          <a:bodyPr rtlCol="0" anchor="ctr" lIns="0" rIns="0"/>
-          <a:lstStyle/>
-          <a:p>
-            <a:pPr algn="ctr"/>
-            <a:r>
-              <a:rPr sz="2200" b="1">
-                <a:solidFill>
-                  <a:srgbClr val="FFFFFF"/>
-                </a:solidFill>
-                <a:latin typeface="Calibri"/>
-              </a:rPr>
-              <a:t>4</a:t>
-            </a:r>
-          </a:p>
-        </p:txBody>
-      </p:sp>
-      <p:sp>
-        <p:nvSpPr>
-          <p:cNvPr id="14" name="TextBox 13"/>
-          <p:cNvSpPr txBox="1"/>
-          <p:nvPr/>
-        </p:nvSpPr>
-        <p:spPr>
-          <a:xfrm>
-            <a:off x="1417320" y="4014215"/>
-            <a:ext cx="10058400" cy="320040"/>
-          </a:xfrm>
-          <a:prstGeom prst="rect">
-            <a:avLst/>
-          </a:prstGeom>
-          <a:noFill/>
-        </p:spPr>
-        <p:txBody>
-          <a:bodyPr wrap="square" anchor="t" lIns="45720" rIns="45720">
-            <a:spAutoFit/>
-          </a:bodyPr>
-          <a:lstStyle/>
-          <a:p>
-            <a:pPr algn="l"/>
-            <a:r>
-              <a:rPr sz="1600" b="1" i="0">
-                <a:solidFill>
-                  <a:srgbClr val="663399"/>
-                </a:solidFill>
-                <a:latin typeface="Calibri"/>
-              </a:rPr>
-              <a:t>Hash equivalence rescues cache from cosmetic changes</a:t>
-            </a:r>
-          </a:p>
-        </p:txBody>
-      </p:sp>
-      <p:sp>
-        <p:nvSpPr>
-          <p:cNvPr id="15" name="TextBox 14"/>
-          <p:cNvSpPr txBox="1"/>
-          <p:nvPr/>
-        </p:nvSpPr>
-        <p:spPr>
-          <a:xfrm>
-            <a:off x="1417320" y="4325112"/>
-            <a:ext cx="10058400" cy="320040"/>
-          </a:xfrm>
-          <a:prstGeom prst="rect">
-            <a:avLst/>
-          </a:prstGeom>
-          <a:noFill/>
-        </p:spPr>
-        <p:txBody>
-          <a:bodyPr wrap="square" anchor="t" lIns="45720" rIns="45720">
-            <a:spAutoFit/>
-          </a:bodyPr>
-          <a:lstStyle/>
-          <a:p>
-            <a:pPr algn="l"/>
-            <a:r>
-              <a:rPr sz="1300" b="0" i="0">
-                <a:solidFill>
-                  <a:srgbClr val="333333"/>
-                </a:solidFill>
-                <a:latin typeface="Calibri"/>
-              </a:rPr>
-              <a:t>Worth it at any team scale; essential beyond 10 devs</a:t>
-            </a:r>
-          </a:p>
-        </p:txBody>
-      </p:sp>
-      <p:sp>
-        <p:nvSpPr>
-          <p:cNvPr id="16" name="Rounded Rectangle 15"/>
-          <p:cNvSpPr/>
-          <p:nvPr/>
-        </p:nvSpPr>
-        <p:spPr>
-          <a:xfrm>
-            <a:off x="822960" y="4727448"/>
-            <a:ext cx="457200" cy="548640"/>
-          </a:xfrm>
-          <a:prstGeom prst="roundRect">
-            <a:avLst/>
-          </a:prstGeom>
-          <a:solidFill>
-            <a:srgbClr val="CC0066"/>
-          </a:solidFill>
-          <a:ln>
-            <a:noFill/>
-          </a:ln>
-          <a:effectLst/>
-        </p:spPr>
-        <p:style>
-          <a:lnRef idx="1">
-            <a:schemeClr val="accent1"/>
-          </a:lnRef>
-          <a:fillRef idx="3">
-            <a:schemeClr val="accent1"/>
-          </a:fillRef>
-          <a:effectRef idx="2">
-            <a:schemeClr val="accent1"/>
-          </a:effectRef>
-          <a:fontRef idx="minor">
-            <a:schemeClr val="lt1"/>
-          </a:fontRef>
-        </p:style>
-        <p:txBody>
-          <a:bodyPr rtlCol="0" anchor="ctr" lIns="0" rIns="0"/>
-          <a:lstStyle/>
-          <a:p>
-            <a:pPr algn="ctr"/>
-            <a:r>
-              <a:rPr sz="2200" b="1">
-                <a:solidFill>
-                  <a:srgbClr val="FFFFFF"/>
-                </a:solidFill>
-                <a:latin typeface="Calibri"/>
-              </a:rPr>
-              <a:t>5</a:t>
-            </a:r>
-          </a:p>
-        </p:txBody>
-      </p:sp>
-      <p:sp>
-        <p:nvSpPr>
-          <p:cNvPr id="17" name="TextBox 16"/>
-          <p:cNvSpPr txBox="1"/>
-          <p:nvPr/>
-        </p:nvSpPr>
-        <p:spPr>
-          <a:xfrm>
-            <a:off x="1417320" y="4727448"/>
-            <a:ext cx="10058400" cy="320040"/>
-          </a:xfrm>
-          <a:prstGeom prst="rect">
-            <a:avLst/>
-          </a:prstGeom>
-          <a:noFill/>
-        </p:spPr>
-        <p:txBody>
-          <a:bodyPr wrap="square" anchor="t" lIns="45720" rIns="45720">
-            <a:spAutoFit/>
-          </a:bodyPr>
-          <a:lstStyle/>
-          <a:p>
-            <a:pPr algn="l"/>
-            <a:r>
-              <a:rPr sz="1600" b="1" i="0">
-                <a:solidFill>
-                  <a:srgbClr val="663399"/>
-                </a:solidFill>
-                <a:latin typeface="Calibri"/>
-              </a:rPr>
-              <a:t>Measure before you tune</a:t>
-            </a:r>
-          </a:p>
-        </p:txBody>
-      </p:sp>
-      <p:sp>
-        <p:nvSpPr>
-          <p:cNvPr id="18" name="TextBox 17"/>
-          <p:cNvSpPr txBox="1"/>
-          <p:nvPr/>
-        </p:nvSpPr>
-        <p:spPr>
-          <a:xfrm>
-            <a:off x="1417320" y="5038344"/>
-            <a:ext cx="10058400" cy="320040"/>
-          </a:xfrm>
-          <a:prstGeom prst="rect">
-            <a:avLst/>
-          </a:prstGeom>
-          <a:noFill/>
-        </p:spPr>
-        <p:txBody>
-          <a:bodyPr wrap="square" anchor="t" lIns="45720" rIns="45720">
-            <a:spAutoFit/>
-          </a:bodyPr>
-          <a:lstStyle/>
-          <a:p>
-            <a:pPr algn="l"/>
-            <a:r>
-              <a:rPr sz="1300" b="0" i="0">
-                <a:solidFill>
-                  <a:srgbClr val="333333"/>
-                </a:solidFill>
-                <a:latin typeface="Calibri"/>
-              </a:rPr>
-              <a:t>buildstats-summary shows the actual slow tasks; don't optimize blind</a:t>
-            </a:r>
-          </a:p>
-        </p:txBody>
-      </p:sp>
-      <p:sp>
-        <p:nvSpPr>
-          <p:cNvPr id="19" name="Rounded Rectangle 18"/>
-          <p:cNvSpPr/>
-          <p:nvPr/>
-        </p:nvSpPr>
-        <p:spPr>
-          <a:xfrm>
-            <a:off x="822960" y="5669280"/>
-            <a:ext cx="10561320" cy="640080"/>
-          </a:xfrm>
-          <a:prstGeom prst="roundRect">
-            <a:avLst/>
-          </a:prstGeom>
-          <a:solidFill>
-            <a:srgbClr val="FBE6F0"/>
-          </a:solidFill>
-          <a:ln>
-            <a:noFill/>
-          </a:ln>
-          <a:effectLst/>
-        </p:spPr>
-        <p:style>
-          <a:lnRef idx="1">
-            <a:schemeClr val="accent1"/>
-          </a:lnRef>
-          <a:fillRef idx="3">
-            <a:schemeClr val="accent1"/>
-          </a:fillRef>
-          <a:effectRef idx="2">
-            <a:schemeClr val="accent1"/>
-          </a:effectRef>
-          <a:fontRef idx="minor">
-            <a:schemeClr val="lt1"/>
-          </a:fontRef>
-        </p:style>
-        <p:txBody>
-          <a:bodyPr rtlCol="0" anchor="ctr" lIns="228600"/>
-          <a:lstStyle/>
-          <a:p>
-            <a:pPr algn="ctr"/>
-            <a:r>
-              <a:rPr sz="1400" b="1">
-                <a:solidFill>
-                  <a:srgbClr val="663399"/>
-                </a:solidFill>
-                <a:latin typeface="Calibri"/>
-              </a:rPr>
-              <a:t>Next session  →  </a:t>
-            </a:r>
-            <a:r>
-              <a:rPr sz="1400">
-                <a:solidFill>
-                  <a:srgbClr val="333333"/>
-                </a:solidFill>
-                <a:latin typeface="Calibri"/>
-              </a:rPr>
-              <a:t>Hands-on lab (45 min) — apply Day 2 to TrainerGW</a:t>
-            </a:r>
-          </a:p>
-        </p:txBody>
-      </p:sp>
-    </p:spTree>
-  </p:cSld>
-  <p:clrMapOvr>
-    <a:masterClrMapping/>
-  </p:clrMapOvr>
-</p:sld>
-</file>
-
-<file path=ppt/slides/slide7.xml><?xml version="1.0" encoding="utf-8"?>
-<p:sld xmlns:a="http://schemas.openxmlformats.org/drawingml/2006/main" xmlns:p="http://schemas.openxmlformats.org/presentationml/2006/main" xmlns:r="http://schemas.openxmlformats.org/officeDocument/2006/relationships">
-  <p:cSld>
-    <p:spTree>
-      <p:nvGrpSpPr>
-        <p:cNvPr id="1" name=""/>
-        <p:cNvGrpSpPr/>
-        <p:nvPr/>
-      </p:nvGrpSpPr>
-      <p:grpSpPr/>
-      <p:sp>
-        <p:nvSpPr>
-          <p:cNvPr id="2" name="Title 1"/>
-          <p:cNvSpPr>
-            <a:spLocks noGrp="1"/>
-          </p:cNvSpPr>
-          <p:nvPr>
-            <p:ph type="ctrTitle"/>
-          </p:nvPr>
-        </p:nvSpPr>
-        <p:spPr/>
-        <p:txBody>
-          <a:bodyPr/>
-          <a:lstStyle/>
-          <a:p>
-            <a:r>
-              <a:rPr sz="4400" b="1">
-                <a:solidFill>
-                  <a:srgbClr val="FFFFFF"/>
-                </a:solidFill>
-                <a:latin typeface="Calibri"/>
-              </a:rPr>
-              <a:t>Performance &amp; Scalability</a:t>
-            </a:r>
-          </a:p>
-        </p:txBody>
-      </p:sp>
-      <p:sp>
-        <p:nvSpPr>
-          <p:cNvPr id="3" name="Subtitle 2"/>
-          <p:cNvSpPr>
-            <a:spLocks noGrp="1"/>
-          </p:cNvSpPr>
-          <p:nvPr>
-            <p:ph type="subTitle" idx="1"/>
-          </p:nvPr>
-        </p:nvSpPr>
-        <p:spPr/>
-        <p:txBody>
-          <a:bodyPr/>
-          <a:lstStyle/>
-          <a:p>
-            <a:r>
-              <a:rPr sz="2200" i="1">
-                <a:solidFill>
-                  <a:srgbClr val="FFFFFF"/>
-                </a:solidFill>
-                <a:latin typeface="Calibri"/>
-              </a:rPr>
-              <a:t>Day 2 • Session 6 • 90 minutes</a:t>
-            </a:r>
-          </a:p>
-          <a:p>
-            <a:r>
-              <a:rPr sz="1800">
-                <a:solidFill>
-                  <a:srgbClr val="FFFFFF"/>
-                </a:solidFill>
-                <a:latin typeface="Calibri"/>
-              </a:rPr>
-              <a:t>sstate strategy, parallelism, hash equivalence</a:t>
-            </a:r>
-          </a:p>
-        </p:txBody>
-      </p:sp>
-    </p:spTree>
-  </p:cSld>
-  <p:clrMapOvr>
-    <a:masterClrMapping/>
-  </p:clrMapOvr>
-</p:sld>
-</file>
-
-<file path=ppt/slides/slide8.xml><?xml version="1.0" encoding="utf-8"?>
-<p:sld xmlns:a="http://schemas.openxmlformats.org/drawingml/2006/main" xmlns:p="http://schemas.openxmlformats.org/presentationml/2006/main" xmlns:r="http://schemas.openxmlformats.org/officeDocument/2006/relationships">
-  <p:cSld>
-    <p:spTree>
-      <p:nvGrpSpPr>
-        <p:cNvPr id="1" name=""/>
-        <p:cNvGrpSpPr/>
-        <p:nvPr/>
-      </p:nvGrpSpPr>
-      <p:grpSpPr/>
-      <p:sp>
-        <p:nvSpPr>
-          <p:cNvPr id="2" name="Title 1"/>
-          <p:cNvSpPr>
-            <a:spLocks noGrp="1"/>
-          </p:cNvSpPr>
-          <p:nvPr>
-            <p:ph type="title"/>
-          </p:nvPr>
-        </p:nvSpPr>
-        <p:spPr/>
-        <p:txBody>
-          <a:bodyPr/>
-          <a:lstStyle/>
-          <a:p>
-            <a:r>
-              <a:rPr sz="3200" b="1">
-                <a:solidFill>
-                  <a:srgbClr val="CC0066"/>
-                </a:solidFill>
-                <a:latin typeface="Calibri"/>
-              </a:rPr>
-              <a:t>Session Agenda</a:t>
-            </a:r>
-          </a:p>
-        </p:txBody>
-      </p:sp>
-      <p:sp>
-        <p:nvSpPr>
-          <p:cNvPr id="3" name="TextBox 2"/>
-          <p:cNvSpPr txBox="1"/>
-          <p:nvPr/>
-        </p:nvSpPr>
-        <p:spPr>
-          <a:xfrm>
-            <a:off x="822960" y="1463040"/>
-            <a:ext cx="10515600" cy="5029200"/>
-          </a:xfrm>
-          <a:prstGeom prst="rect">
-            <a:avLst/>
-          </a:prstGeom>
-          <a:noFill/>
-        </p:spPr>
-        <p:txBody>
-          <a:bodyPr wrap="square" lIns="45720" rIns="45720">
-            <a:spAutoFit/>
-          </a:bodyPr>
-          <a:lstStyle/>
-          <a:p>
-            <a:pPr>
-              <a:spcAft>
-                <a:spcPts val="600"/>
-              </a:spcAft>
-            </a:pPr>
-            <a:r>
-              <a:rPr sz="2000" b="0" i="0">
-                <a:solidFill>
-                  <a:srgbClr val="333333"/>
-                </a:solidFill>
-                <a:latin typeface="Calibri"/>
-              </a:rPr>
-              <a:t>1.  How sstate cache really works</a:t>
-            </a:r>
-          </a:p>
-          <a:p>
-            <a:pPr>
-              <a:spcAft>
-                <a:spcPts val="600"/>
-              </a:spcAft>
-            </a:pPr>
-            <a:r>
-              <a:rPr sz="2000" b="0" i="0">
-                <a:solidFill>
-                  <a:srgbClr val="333333"/>
-                </a:solidFill>
-                <a:latin typeface="Calibri"/>
-              </a:rPr>
-              <a:t>2.  Local cache vs shared mirror</a:t>
-            </a:r>
-          </a:p>
-          <a:p>
-            <a:pPr>
-              <a:spcAft>
-                <a:spcPts val="600"/>
-              </a:spcAft>
-            </a:pPr>
-            <a:r>
-              <a:rPr sz="2000" b="0" i="0">
-                <a:solidFill>
-                  <a:srgbClr val="333333"/>
-                </a:solidFill>
-                <a:latin typeface="Calibri"/>
-              </a:rPr>
-              <a:t>3.  Setting up a team sstate mirror</a:t>
-            </a:r>
-          </a:p>
-          <a:p>
-            <a:pPr>
-              <a:spcAft>
-                <a:spcPts val="600"/>
-              </a:spcAft>
-            </a:pPr>
-            <a:r>
-              <a:rPr sz="2000" b="0" i="0">
-                <a:solidFill>
-                  <a:srgbClr val="333333"/>
-                </a:solidFill>
-                <a:latin typeface="Calibri"/>
-              </a:rPr>
-              <a:t>4.  Parallelism — BB_NUMBER_THREADS, PARALLEL_MAKE</a:t>
-            </a:r>
-          </a:p>
-          <a:p>
-            <a:pPr>
-              <a:spcAft>
-                <a:spcPts val="600"/>
-              </a:spcAft>
-            </a:pPr>
-            <a:r>
-              <a:rPr sz="2000" b="0" i="0">
-                <a:solidFill>
-                  <a:srgbClr val="333333"/>
-                </a:solidFill>
-                <a:latin typeface="Calibri"/>
-              </a:rPr>
-              <a:t>5.  Avoiding OOM and thrashing</a:t>
-            </a:r>
-          </a:p>
-          <a:p>
-            <a:pPr>
-              <a:spcAft>
-                <a:spcPts val="600"/>
-              </a:spcAft>
-            </a:pPr>
-            <a:r>
-              <a:rPr sz="2000" b="0" i="0">
-                <a:solidFill>
-                  <a:srgbClr val="333333"/>
-                </a:solidFill>
-                <a:latin typeface="Calibri"/>
-              </a:rPr>
-              <a:t>6.  Hash equivalence — reusing more cache hits</a:t>
-            </a:r>
-          </a:p>
-          <a:p>
-            <a:pPr>
-              <a:spcAft>
-                <a:spcPts val="600"/>
-              </a:spcAft>
-            </a:pPr>
-            <a:r>
-              <a:rPr sz="2000" b="0" i="0">
-                <a:solidFill>
-                  <a:srgbClr val="333333"/>
-                </a:solidFill>
-                <a:latin typeface="Calibri"/>
-              </a:rPr>
-              <a:t>7.  Measuring what's slow</a:t>
-            </a:r>
-          </a:p>
-        </p:txBody>
-      </p:sp>
-    </p:spTree>
-  </p:cSld>
-  <p:clrMapOvr>
-    <a:masterClrMapping/>
-  </p:clrMapOvr>
-</p:sld>
-</file>
-
-<file path=ppt/slides/slide9.xml><?xml version="1.0" encoding="utf-8"?>
-<p:sld xmlns:a="http://schemas.openxmlformats.org/drawingml/2006/main" xmlns:p="http://schemas.openxmlformats.org/presentationml/2006/main" xmlns:r="http://schemas.openxmlformats.org/officeDocument/2006/relationships">
-  <p:cSld>
-    <p:spTree>
-      <p:nvGrpSpPr>
-        <p:cNvPr id="1" name=""/>
-        <p:cNvGrpSpPr/>
-        <p:nvPr/>
-      </p:nvGrpSpPr>
-      <p:grpSpPr/>
-      <p:sp>
-        <p:nvSpPr>
-          <p:cNvPr id="2" name="Title 1"/>
-          <p:cNvSpPr>
-            <a:spLocks noGrp="1"/>
-          </p:cNvSpPr>
-          <p:nvPr>
-            <p:ph type="title"/>
-          </p:nvPr>
-        </p:nvSpPr>
-        <p:spPr/>
-        <p:txBody>
-          <a:bodyPr/>
-          <a:lstStyle/>
-          <a:p>
-            <a:r>
-              <a:rPr sz="3200" b="1">
-                <a:solidFill>
-                  <a:srgbClr val="CC0066"/>
-                </a:solidFill>
-                <a:latin typeface="Calibri"/>
-              </a:rPr>
-              <a:t>How sstate Cache Works</a:t>
-            </a:r>
-          </a:p>
-        </p:txBody>
-      </p:sp>
-      <p:sp>
-        <p:nvSpPr>
-          <p:cNvPr id="3" name="TextBox 2"/>
-          <p:cNvSpPr txBox="1"/>
-          <p:nvPr/>
-        </p:nvSpPr>
-        <p:spPr>
-          <a:xfrm>
-            <a:off x="822960" y="1417320"/>
-            <a:ext cx="10515600" cy="365760"/>
-          </a:xfrm>
-          <a:prstGeom prst="rect">
-            <a:avLst/>
-          </a:prstGeom>
-          <a:noFill/>
-        </p:spPr>
-        <p:txBody>
-          <a:bodyPr wrap="square" anchor="t" lIns="45720" rIns="45720">
-            <a:spAutoFit/>
-          </a:bodyPr>
-          <a:lstStyle/>
-          <a:p>
-            <a:pPr algn="l"/>
-            <a:r>
-              <a:rPr sz="1500" b="0" i="1">
-                <a:solidFill>
-                  <a:srgbClr val="666666"/>
-                </a:solidFill>
-                <a:latin typeface="Calibri"/>
-              </a:rPr>
-              <a:t>Yocto's superpower — and why builds get fast.</a:t>
-            </a:r>
-          </a:p>
-        </p:txBody>
-      </p:sp>
-      <p:sp>
-        <p:nvSpPr>
-          <p:cNvPr id="4" name="TextBox 3"/>
-          <p:cNvSpPr txBox="1"/>
-          <p:nvPr/>
-        </p:nvSpPr>
-        <p:spPr>
-          <a:xfrm>
-            <a:off x="822960" y="1783080"/>
-            <a:ext cx="10515600" cy="4480560"/>
-          </a:xfrm>
-          <a:prstGeom prst="rect">
-            <a:avLst/>
-          </a:prstGeom>
-          <a:noFill/>
-        </p:spPr>
-        <p:txBody>
-          <a:bodyPr wrap="square" lIns="45720" rIns="45720">
-            <a:spAutoFit/>
-          </a:bodyPr>
-          <a:lstStyle/>
-          <a:p>
-            <a:pPr>
-              <a:spcAft>
-                <a:spcPts val="400"/>
-              </a:spcAft>
-            </a:pPr>
-            <a:r>
-              <a:rPr sz="1600" b="1" i="0">
-                <a:solidFill>
-                  <a:srgbClr val="CC0066"/>
-                </a:solidFill>
-                <a:latin typeface="Calibri"/>
-              </a:rPr>
-              <a:t>Every task has a signature</a:t>
-            </a:r>
-          </a:p>
-          <a:p>
-            <a:pPr>
-              <a:spcAft>
-                <a:spcPts val="1000"/>
-              </a:spcAft>
-            </a:pPr>
-            <a:r>
-              <a:rPr sz="1300" b="0" i="0">
-                <a:solidFill>
-                  <a:srgbClr val="333333"/>
-                </a:solidFill>
-                <a:latin typeface="Calibri"/>
-              </a:rPr>
-              <a:t>A hash computed from all the inputs: source content, recipe content, config variables, dependencies' signatures.</a:t>
-            </a:r>
-          </a:p>
-          <a:p>
-            <a:pPr>
-              <a:spcAft>
-                <a:spcPts val="400"/>
-              </a:spcAft>
-            </a:pPr>
-            <a:r>
-              <a:rPr sz="1600" b="1" i="0">
-                <a:solidFill>
-                  <a:srgbClr val="CC0066"/>
-                </a:solidFill>
-                <a:latin typeface="Calibri"/>
-              </a:rPr>
-              <a:t>Signature → cache lookup</a:t>
-            </a:r>
-          </a:p>
-          <a:p>
-            <a:pPr>
-              <a:spcAft>
-                <a:spcPts val="1000"/>
-              </a:spcAft>
-            </a:pPr>
-            <a:r>
-              <a:rPr sz="1300" b="0" i="0">
-                <a:solidFill>
-                  <a:srgbClr val="333333"/>
-                </a:solidFill>
-                <a:latin typeface="Calibri"/>
-              </a:rPr>
-              <a:t>Before running a task, BitBake checks SSTATE_DIR for a tarball with that signature. If found: extract, skip the task.</a:t>
-            </a:r>
-          </a:p>
-          <a:p>
-            <a:pPr>
-              <a:spcAft>
-                <a:spcPts val="400"/>
-              </a:spcAft>
-            </a:pPr>
-            <a:r>
-              <a:rPr sz="1600" b="1" i="0">
-                <a:solidFill>
-                  <a:srgbClr val="CC0066"/>
-                </a:solidFill>
-                <a:latin typeface="Calibri"/>
-              </a:rPr>
-              <a:t>What changes invalidate the cache?</a:t>
-            </a:r>
-          </a:p>
-          <a:p>
-            <a:pPr>
-              <a:spcAft>
-                <a:spcPts val="400"/>
-              </a:spcAft>
-            </a:pPr>
-            <a:r>
-              <a:rPr sz="1300" b="0" i="0">
-                <a:solidFill>
-                  <a:srgbClr val="333333"/>
-                </a:solidFill>
-                <a:latin typeface="Calibri"/>
-              </a:rPr>
-              <a:t>• Source code change (different sha256)</a:t>
-            </a:r>
-          </a:p>
-          <a:p>
-            <a:pPr>
-              <a:spcAft>
-                <a:spcPts val="400"/>
-              </a:spcAft>
-            </a:pPr>
-            <a:r>
-              <a:rPr sz="1300" b="0" i="0">
-                <a:solidFill>
-                  <a:srgbClr val="333333"/>
-                </a:solidFill>
-                <a:latin typeface="Calibri"/>
-              </a:rPr>
-              <a:t>• Recipe change (any line, including comments)</a:t>
-            </a:r>
-          </a:p>
-          <a:p>
-            <a:pPr>
-              <a:spcAft>
-                <a:spcPts val="400"/>
-              </a:spcAft>
-            </a:pPr>
-            <a:r>
-              <a:rPr sz="1300" b="0" i="0">
-                <a:solidFill>
-                  <a:srgbClr val="333333"/>
-                </a:solidFill>
-                <a:latin typeface="Calibri"/>
-              </a:rPr>
-              <a:t>• Config variables the task depends on</a:t>
-            </a:r>
-          </a:p>
-          <a:p>
-            <a:pPr>
-              <a:spcAft>
-                <a:spcPts val="400"/>
-              </a:spcAft>
-            </a:pPr>
-            <a:r>
-              <a:rPr sz="1300" b="0" i="0">
-                <a:solidFill>
-                  <a:srgbClr val="333333"/>
-                </a:solidFill>
-                <a:latin typeface="Calibri"/>
-              </a:rPr>
-              <a:t>• Toolchain change (different gcc version)</a:t>
-            </a:r>
-          </a:p>
-          <a:p>
-            <a:pPr>
-              <a:spcAft>
-                <a:spcPts val="400"/>
-              </a:spcAft>
-            </a:pPr>
-            <a:r>
-              <a:rPr sz="1300" b="0" i="0">
-                <a:solidFill>
-                  <a:srgbClr val="333333"/>
-                </a:solidFill>
-                <a:latin typeface="Calibri"/>
-              </a:rPr>
-              <a:t>• Dependency's signature change (cascades)</a:t>
             </a:r>
           </a:p>
         </p:txBody>
